--- a/docs/architecture-oss.pptx
+++ b/docs/architecture-oss.pptx
@@ -511,17 +511,22 @@
           <a:lstStyle/>
           <a:p>
             <a:r>
-              <a:t>- 接頭辞は &lt;owner&gt;-nwc-oss。state も別なので、マネージド版と名前はぶつからない。</a:t>
-            </a:r>
-          </a:p>
-          <a:p>
-            <a:r>
-              <a:t>- 赤枠の 5 つ（Kafka・Spark・OpenSearch・VictoriaMetrics・Neo4j）が置き換え。</a:t>
-            </a:r>
-          </a:p>
-          <a:p>
-            <a:r>
-              <a:t>- Nautobot の Job から Neo4j への同期はまだつないでいない（Nautobot のイメージに Neo4j のドライバが無い）。lab の定義からの ops/sync-graph.sh --oss で代える。</a:t>
+              <a:t>- 元の 2 枚目は絵だったが、外した部品（ECS の Kafbat UI、Telegraf の dialin）と古い収集が描かれていたので 2 列の箇条書きにした（docs/cycles/021-architecture-decks/build.md）。</a:t>
+            </a:r>
+          </a:p>
+          <a:p>
+            <a:r>
+              <a:t>- 接頭辞は &lt;owner&gt;-nwc-oss（マネージド版は &lt;owner&gt;-nwc-poc）。Terraform のルートと state も IaC/terraform/oss/ の下で別（docs/oss-variant.md）。</a:t>
+            </a:r>
+          </a:p>
+          <a:p>
+            <a:r>
+              <a:t>- 何を何に替えたかは次の 3 枚目。収集 4 種は gnmic・Telegraf（trap）・syslog-ng・GoFlow2 で、マネージド版と同じ。</a:t>
+            </a:r>
+          </a:p>
+          <a:p>
+            <a:r>
+              <a:t>- Nautobot の Job から Neo4j への同期は、元のデッキ（2026-10-08 版）では未接続だったが、いまはつながっている。2026-10-08 に AWS で、手で打つ Job と JobHook の両方が Neo4j に書いた（docs/oss-variant.md、docs/verification/20261008-oss-aws.md）。</a:t>
             </a:r>
           </a:p>
         </p:txBody>
@@ -591,7 +596,17 @@
           <a:lstStyle/>
           <a:p>
             <a:r>
-              <a:t>- KB の OpenSearch Serverless は変えない（置き換えたのはログの検索のほう）。</a:t>
+              <a:t>- 正: docs/oss-variant.md の対応表。OSS 版の正式な名前は Apache Kafka（KRaft）、Apache Spark 3.5、OpenSearch、VictoriaMetrics のクラスター（vminsert・vmselect・vmstorage）、Neo4j Community Edition + GDS。</a:t>
+            </a:r>
+          </a:p>
+          <a:p>
+            <a:r>
+              <a:t>- 変えないもの（マネージドのまま）: AgentCore・Bedrock・S3 Tables・RDS・ECS Fargate・SNS・SQS・Lambda・CloudWatch Logs・SSM・閉域。元のデッキは本文に並べていたが、文字を 20 pt に保つため本文は代表の 3 つにして、全部をここに書いた。</a:t>
+            </a:r>
+          </a:p>
+          <a:p>
+            <a:r>
+              <a:t>- 手順書の検索（Bedrock のナレッジベース + OpenSearch Serverless）はマネージドのまま変えないが、ops/oss/up.sh はナレッジベースを作らない（CREATE_KB も読まない）。元のデッキは「変えないもの」に KB を入れていたが、OSS 版では作られないので外して、ここに書いた。</a:t>
             </a:r>
           </a:p>
           <a:p>
@@ -671,22 +686,27 @@
           <a:lstStyle/>
           <a:p>
             <a:r>
-              <a:t>- イメージ: apache/kafka:4.3.1、apache/spark:3.5.9（自前）、opensearchproject/opensearch:3.9.0、victoriametrics/*:v1.153.0-cluster、neo4j:2026.09.0-community + GDS、Kafbat UI は ghcr.io/kafbat/kafka-ui:v1.5.0。</a:t>
-            </a:r>
-          </a:p>
-          <a:p>
-            <a:r>
-              <a:t>- Cloud Map の名前: kafka-1..3、opensearch・opensearch-cm、vminsert・vmselect・vmstorage-1..3、neo4j、kafka-ui。</a:t>
-            </a:r>
-          </a:p>
-          <a:p>
-            <a:r>
-              <a:t>- OpenSearch と Neo4j はネットワークファイルシステムを避けるので EFS を使わない。OpenSearch のデータの台は一時領域 30 GiB。</a:t>
-            </a:r>
-          </a:p>
-          <a:p>
-            <a:r>
-              <a:t>- VictoriaMetrics は insert 1・select 1・storage 3 で、複製数 2。</a:t>
+              <a:t>- タスクの数: Kafka は AZ に 1 つで 3、Spark はジョブ（iceberg・splunk・http）に 1 つで 3、OpenSearch はデータ 2・まとめ役 1、VictoriaMetrics は vminsert 1・vmselect 1・vmstorage 3（複製数 2）、Neo4j は単独 1。3 + 3 + 3 + 5 + 1 = 15。</a:t>
+            </a:r>
+          </a:p>
+          <a:p>
+            <a:r>
+              <a:t>- 大きさは各ルートの variables の既定値: Kafka 1024 / 2048、Spark 2048 / 4096、OpenSearch のデータ 1024 / 4096・まとめ役 512 / 1024、VictoriaMetrics 512 / 1024（5 つとも）、Neo4j 1024 / 4096。</a:t>
+            </a:r>
+          </a:p>
+          <a:p>
+            <a:r>
+              <a:t>- Spark の S3 は checkpoint（Kafka の offset）。OpenSearch と Neo4j はネットワークファイルシステムを避けるので EFS を使わず、タスクの一時領域に置く。OpenSearch のデータの台は一時領域 30 GiB。</a:t>
+            </a:r>
+          </a:p>
+          <a:p>
+            <a:r>
+              <a:t>- イメージ（ops/oss/oss-images.sh）: apache/kafka:4.3.1、apache/spark:3.5.9（自前）、opensearchproject/opensearch:3.9.0、victoriametrics/*:v1.153.0-cluster、neo4j:2026.09.0-community + GDS。</a:t>
+            </a:r>
+          </a:p>
+          <a:p>
+            <a:r>
+              <a:t>- 元のデッキの「これに Kafbat UI がもう 1 個」は外した。Kafbat UI（v1.5.0）は 010 から Web の EC2 の Docker で動き、Fargate のタスクではない（docs/oss-variant.md）。</a:t>
             </a:r>
           </a:p>
         </p:txBody>
@@ -756,12 +776,27 @@
           <a:lstStyle/>
           <a:p>
             <a:r>
-              <a:t>- base/core の oss.tf はマネージド版と共通のファイル。var.project が nwc-oss のときだけ SG と EFS を作る。</a:t>
-            </a:r>
-          </a:p>
-          <a:p>
-            <a:r>
-              <a:t>- マネージド版の数は stream 37、graph 10、analytics 53。</a:t>
+              <a:t>- 数は tf の resource ブロックの数（ルートの *.tf をつないで grep -c '^resource "'。シンボリックリンクの先も数える。2026-10-09、origin/main 9fb0616）。count・for_each で増える実数ではない。</a:t>
+            </a:r>
+          </a:p>
+          <a:p>
+            <a:r>
+              <a:t>- マネージド版の数は stream 57、graph 10、analytics 53、base/core 39。元のデッキの stream 46 は、013 で収集 4 種（gnmic・syslog-ng・GoFlow2）が入って 66 になった。</a:t>
+            </a:r>
+          </a:p>
+          <a:p>
+            <a:r>
+              <a:t>- 自分のファイル: stream は kafka.tf、graph は access・neo4j・outputs・sync、analytics は grafana・locals・network・opensearch・outputs・spark・victoriametrics。残りはマネージド版のファイルへのシンボリックリンクと oss.auto.tfvars（project = "nwc-oss"）。</a:t>
+            </a:r>
+          </a:p>
+          <a:p>
+            <a:r>
+              <a:t>- ほかの 6 つ（base/ecr・base/core・agent・workflow・pipeline/lab・pipeline/nautobot）は IaC/terraform/aws-managed/ の同じルートへのシンボリックリンクに oss.auto.tfvars を足しただけ。</a:t>
+            </a:r>
+          </a:p>
+          <a:p>
+            <a:r>
+              <a:t>- base/core の oss.tf はマネージド版と共通のファイル（IaC/terraform/aws-managed/base/core/oss.tf）。var.project が nwc-oss のときだけ SG と EFS を作る。</a:t>
             </a:r>
           </a:p>
         </p:txBody>
@@ -831,17 +866,32 @@
           <a:lstStyle/>
           <a:p>
             <a:r>
-              <a:t>- ノードどうし: kafka 9092–9093、opensearch 9300、victoriametrics 8400–8401。</a:t>
-            </a:r>
-          </a:p>
-          <a:p>
-            <a:r>
-              <a:t>- web → neo4j 7474 は Neo4j Browser（SSM のポートフォワード）。</a:t>
-            </a:r>
-          </a:p>
-          <a:p>
-            <a:r>
-              <a:t>- kafka・opensearch・victoriametrics・neo4j はエンドポイントと S3 へ 443。</a:t>
+              <a:t>- 元の 6 枚目は絵だったが、1 段目に古い収集（Telegraf が trap・syslog を受け gNMI・SNMP を取る）が描かれていたので、マネージド版の 4 枚目と同じ形の箇条書きにした（build.md）。</a:t>
+            </a:r>
+          </a:p>
+          <a:p>
+            <a:r>
+              <a:t>- 1: gnmic・Telegraf（trap）・syslog-ng・GoFlow2 が Kafka の 9092 へ書く。トピックは metrics・gnmi・traps・logs・flows で、マネージド版と同じ。</a:t>
+            </a:r>
+          </a:p>
+          <a:p>
+            <a:r>
+              <a:t>- 2: Spark のジョブは iceberg（S3 Tables）・splunk（HEC）・http（OpenSearch と VictoriaMetrics の vminsert）。格納先 4 つは S3 Tables・OpenSearch・VictoriaMetrics・Splunk で、ops/oss/up.sh はいつも 4 つとも作る。</a:t>
+            </a:r>
+          </a:p>
+          <a:p>
+            <a:r>
+              <a:t>- 3: Grafana のデータソースは OpenSearch と vmselect（PromQL）。</a:t>
+            </a:r>
+          </a:p>
+          <a:p>
+            <a:r>
+              <a:t>- 4・5: SNS → status の Lambda が Neo4j の status を書く。link_down は SQS → Temporal → Web の承認タブ → SSM Run Command（マネージド版と同じ）。</a:t>
+            </a:r>
+          </a:p>
+          <a:p>
+            <a:r>
+              <a:t>- 6: エージェントの centrality は GDS、root_cause と topology_graph の source は neo4j（docs/oss-variant.md）。</a:t>
             </a:r>
           </a:p>
         </p:txBody>
@@ -911,12 +961,42 @@
           <a:lstStyle/>
           <a:p>
             <a:r>
-              <a:t>- 全体: lab でリンクを落とすと、Grafana のアラート → SNS → Lambda → Neo4j の status → Web のトポロジまでつながった。エージェントの centrality・search_logs・query_metrics が答えた。</a:t>
-            </a:r>
-          </a:p>
-          <a:p>
-            <a:r>
-              <a:t>- oss/ops/down.sh で消えた。残るのは Runtime の ENI が外れるまでの VPC・サブネット・runtime の SG と、KEEP_ECR=1 の ECR（どちらも時間課金は無い）。</a:t>
+              <a:t>- MSK の SG とその行を外し、表の行を足した。ほかの行はマネージド版のまま（元のデッキのリード文。文字を 20 pt に保つためここへ移した）。</a:t>
+            </a:r>
+          </a:p>
+          <a:p>
+            <a:r>
+              <a:t>- 正: IaC/terraform/aws-managed/base/core/oss.tf の SG の行。</a:t>
+            </a:r>
+          </a:p>
+          <a:p>
+            <a:r>
+              <a:t>- 9092 の収集 4 種は telegraf_dialout・gnmic・syslog_ng・goflow2。web は Web の EC2 の Kafbat UI（元のデッキの kafka_ui の SG は 010 で無くなった）。</a:t>
+            </a:r>
+          </a:p>
+          <a:p>
+            <a:r>
+              <a:t>- victoriametrics: spark が書く 8480（vminsert）、grafana・runtime・lambda が読む 8481（vmselect）。</a:t>
+            </a:r>
+          </a:p>
+          <a:p>
+            <a:r>
+              <a:t>- EFS の policy は TLS でない接続を拒む。</a:t>
+            </a:r>
+          </a:p>
+          <a:p>
+            <a:r>
+              <a:t>- ノードどうし: kafka 9092〜9093、opensearch 9300、victoriametrics 8400〜8401。</a:t>
+            </a:r>
+          </a:p>
+          <a:p>
+            <a:r>
+              <a:t>- web → neo4j 7474 は Neo4j Browser（SSM のポートフォワード）。</a:t>
+            </a:r>
+          </a:p>
+          <a:p>
+            <a:r>
+              <a:t>- 新しい SG（kafka・opensearch・victoriametrics・neo4j など）はエンドポイントと S3 へ 443。</a:t>
             </a:r>
           </a:p>
         </p:txBody>
@@ -986,12 +1066,217 @@
           <a:lstStyle/>
           <a:p>
             <a:r>
-              <a:t>- 設計のリスクから: OpenSearch はデータの 2 台が同時に落ちるとデータが消える。Kafka と OpenSearch の入れ替え（ローリング）は未実装。</a:t>
-            </a:r>
-          </a:p>
-          <a:p>
-            <a:r>
-              <a:t>- Nautobot の Job → Neo4j の同期は未接続（sync-graph --oss で代える）。</a:t>
+              <a:t>- 作る順（ROOTS は ops/oss/up.sh:155）: base/ecr → base/core → agent → lab → stream → graph → nautobot → analytics → workflow。ops/oss/down.sh はこの逆。</a:t>
+            </a:r>
+          </a:p>
+          <a:p>
+            <a:r>
+              <a:t>- 元のタイトルの oss/ops/up.sh は、017 で ops/oss/up.sh に移ったので直した（中身の主張は同じ）。</a:t>
+            </a:r>
+          </a:p>
+          <a:p>
+            <a:r>
+              <a:t>- 1 台ずつの入れ替えは ops/oss/roll-nodes.sh。stream と analytics の apply の前に、変わる台をリーダーでない方から 1 台ずつ apply し、間で健全に戻るのを ECS Exec で待つ。OSS_ROLL=0 で一度に入れ替える（docs/oss-variant.md）。2026-10-08 の 2 回目で Kafka の 3 台を入れ替えて rc=0（13 分 57 秒）。標準入力が端末でないときに付ける疑似端末のうち、Linux の script -q -c の形は AWS では未確認。</a:t>
+            </a:r>
+          </a:p>
+          <a:p>
+            <a:r>
+              <a:t>- 39 分 05 秒（rc=0）と約 $1.55/h は docs/verification/20261008-oss-aws.md（見積もりは公開の価格表から。請求書では確かめていない）。マネージド版（約 $2.92/h）の約半分。</a:t>
+            </a:r>
+          </a:p>
+          <a:p>
+            <a:r>
+              <a:t>- 21.5 vCPU は 10-08 の 22 サービスで測った値（ARM 19.5 + Splunk の x86 2）。その後に外れた部品があるので、いまの構成での値は測っていない。</a:t>
+            </a:r>
+          </a:p>
+          <a:p>
+            <a:r>
+              <a:t>- 元のデッキの「EFS は $0.36 / GB 月。時間課金の合計と所要時間は docs にまだ無い」は、10-08 の記録で合計と所要時間が出たので置き換えた。EFS の単価は docs/cycles/005-oss-on-ecs/design.md。</a:t>
+            </a:r>
+          </a:p>
+        </p:txBody>
+      </p:sp>
+      <p:sp>
+        <p:nvSpPr>
+          <p:cNvPr id="4" name="Slide Number Placeholder 3"/>
+          <p:cNvSpPr>
+            <a:spLocks noGrp="1"/>
+          </p:cNvSpPr>
+          <p:nvPr>
+            <p:ph type="sldNum" idx="5" sz="quarter"/>
+          </p:nvPr>
+        </p:nvSpPr>
+        <p:spPr/>
+      </p:sp>
+    </p:spTree>
+  </p:cSld>
+  <p:clrMapOvr>
+    <a:masterClrMapping/>
+  </p:clrMapOvr>
+</p:notes>
+</file>
+
+<file path=ppt/notesSlides/notesSlide8.xml><?xml version="1.0" encoding="utf-8"?>
+<p:notes xmlns:a="http://schemas.openxmlformats.org/drawingml/2006/main" xmlns:p="http://schemas.openxmlformats.org/presentationml/2006/main" xmlns:r="http://schemas.openxmlformats.org/officeDocument/2006/relationships">
+  <p:cSld>
+    <p:spTree>
+      <p:nvGrpSpPr>
+        <p:cNvPr id="1" name=""/>
+        <p:cNvGrpSpPr/>
+        <p:nvPr/>
+      </p:nvGrpSpPr>
+      <p:grpSpPr>
+        <a:xfrm>
+          <a:off x="0" y="0"/>
+          <a:ext cx="0" cy="0"/>
+          <a:chOff x="0" y="0"/>
+          <a:chExt cx="0" cy="0"/>
+        </a:xfrm>
+      </p:grpSpPr>
+      <p:sp>
+        <p:nvSpPr>
+          <p:cNvPr id="2" name="Slide Image Placeholder 1"/>
+          <p:cNvSpPr>
+            <a:spLocks noGrp="1"/>
+          </p:cNvSpPr>
+          <p:nvPr>
+            <p:ph type="sldImg" idx="2"/>
+          </p:nvPr>
+        </p:nvSpPr>
+        <p:spPr/>
+      </p:sp>
+      <p:sp>
+        <p:nvSpPr>
+          <p:cNvPr id="3" name="Notes Placeholder 2"/>
+          <p:cNvSpPr>
+            <a:spLocks noGrp="1"/>
+          </p:cNvSpPr>
+          <p:nvPr>
+            <p:ph type="body" idx="3" sz="quarter"/>
+          </p:nvPr>
+        </p:nvSpPr>
+        <p:spPr/>
+        <p:txBody>
+          <a:bodyPr/>
+          <a:lstStyle/>
+          <a:p>
+            <a:r>
+              <a:t>- 正: docs/verification/20261008-oss-aws.md。1 回目は 2026-10-07（元のデッキの 9 枚目）。</a:t>
+            </a:r>
+          </a:p>
+          <a:p>
+            <a:r>
+              <a:t>- 全体: lab でリンクを落とすと、アラート → Temporal のワークフロー → 修復案 → 承認 → 修復 → verified まで一続きで通った。異常の検知は約 2 分、承認から verified まで 76 秒。エージェントの centrality・search_logs・query_metrics が答えた。</a:t>
+            </a:r>
+          </a:p>
+          <a:p>
+            <a:r>
+              <a:t>- 1 台ずつ止めた: kafka-2・vmstorage-2・opensearch-2。Kafka は metrics が増え続け、OpenSearch は yellow で 33 件を検索でき、VictoriaMetrics の最新の値の古さは 8.9 秒。21:37:54（UTC）に green・under-replicated 0 に戻った。</a:t>
+            </a:r>
+          </a:p>
+          <a:p>
+            <a:r>
+              <a:t>- Kafka の入れ替え: 1 回目は端末の無いシェルで ECS Exec が EOF で切れて止まり、疑似端末を付けた 2 回目で rc=0。</a:t>
+            </a:r>
+          </a:p>
+          <a:p>
+            <a:r>
+              <a:t>- Neo4j: Nautobot の Job と JobHook が書いた。止めたあと sync-graph --oss と Job の 2 段で戻った（変更履歴 19 件）。</a:t>
+            </a:r>
+          </a:p>
+          <a:p>
+            <a:r>
+              <a:t>- Spark: S3 Tables 59,991 行（21:28）。Splunk は gnmi 352・logs 14・metrics 66,946・traps 5（120 分の窓）。</a:t>
+            </a:r>
+          </a:p>
+          <a:p>
+            <a:r>
+              <a:t>- down.sh は rc=1（1 時間 41 分 49 秒）。時間課金のあるものは全部消え、Runtime の ENI に掴まれた VPC 一式、SSM のパラメータ 1 つ、KEEP_ECR=1 の ECR 18 個が残った（どれも時間課金なし）。rc=1 は同じ名前の VPC が 2 つあったための不具合（記録の「不具合」5）。</a:t>
+            </a:r>
+          </a:p>
+        </p:txBody>
+      </p:sp>
+      <p:sp>
+        <p:nvSpPr>
+          <p:cNvPr id="4" name="Slide Number Placeholder 3"/>
+          <p:cNvSpPr>
+            <a:spLocks noGrp="1"/>
+          </p:cNvSpPr>
+          <p:nvPr>
+            <p:ph type="sldNum" idx="5" sz="quarter"/>
+          </p:nvPr>
+        </p:nvSpPr>
+        <p:spPr/>
+      </p:sp>
+    </p:spTree>
+  </p:cSld>
+  <p:clrMapOvr>
+    <a:masterClrMapping/>
+  </p:clrMapOvr>
+</p:notes>
+</file>
+
+<file path=ppt/notesSlides/notesSlide9.xml><?xml version="1.0" encoding="utf-8"?>
+<p:notes xmlns:a="http://schemas.openxmlformats.org/drawingml/2006/main" xmlns:p="http://schemas.openxmlformats.org/presentationml/2006/main" xmlns:r="http://schemas.openxmlformats.org/officeDocument/2006/relationships">
+  <p:cSld>
+    <p:spTree>
+      <p:nvGrpSpPr>
+        <p:cNvPr id="1" name=""/>
+        <p:cNvGrpSpPr/>
+        <p:nvPr/>
+      </p:nvGrpSpPr>
+      <p:grpSpPr>
+        <a:xfrm>
+          <a:off x="0" y="0"/>
+          <a:ext cx="0" cy="0"/>
+          <a:chOff x="0" y="0"/>
+          <a:chExt cx="0" cy="0"/>
+        </a:xfrm>
+      </p:grpSpPr>
+      <p:sp>
+        <p:nvSpPr>
+          <p:cNvPr id="2" name="Slide Image Placeholder 1"/>
+          <p:cNvSpPr>
+            <a:spLocks noGrp="1"/>
+          </p:cNvSpPr>
+          <p:nvPr>
+            <p:ph type="sldImg" idx="2"/>
+          </p:nvPr>
+        </p:nvSpPr>
+        <p:spPr/>
+      </p:sp>
+      <p:sp>
+        <p:nvSpPr>
+          <p:cNvPr id="3" name="Notes Placeholder 2"/>
+          <p:cNvSpPr>
+            <a:spLocks noGrp="1"/>
+          </p:cNvSpPr>
+          <p:nvPr>
+            <p:ph type="body" idx="3" sz="quarter"/>
+          </p:nvPr>
+        </p:nvSpPr>
+        <p:spPr/>
+        <p:txBody>
+          <a:bodyPr/>
+          <a:lstStyle/>
+          <a:p>
+            <a:r>
+              <a:t>- 正: docs/oss-variant.md の「AWS で確かめたこと」の表の右の列。</a:t>
+            </a:r>
+          </a:p>
+          <a:p>
+            <a:r>
+              <a:t>- 設計のリスクから: OpenSearch はデータの 2 台が同時に落ちるとデータが消える。</a:t>
+            </a:r>
+          </a:p>
+          <a:p>
+            <a:r>
+              <a:t>- 元のデッキの「Kafka と OpenSearch の入れ替え（ローリング）は未実装」「Nautobot の Job → Neo4j の同期は未接続」は、どちらも 2026-10-08 までに入って AWS で確かめたので外した。</a:t>
+            </a:r>
+          </a:p>
+          <a:p>
+            <a:r>
+              <a:t>- そのほか未確認: ops/oss/roll-nodes.sh の Linux の script -q -c の形、21.5 vCPU のいまの構成での値。</a:t>
             </a:r>
           </a:p>
         </p:txBody>
@@ -4162,7 +4447,7 @@
                 <a:ea typeface="Menlo"/>
                 <a:cs typeface="Menlo"/>
               </a:rPr>
-              <a:t>2026-10-08  /  docs/oss-variant.md、docs/cycles/005-oss-on-ecs/design.md、oss/terraform/、terraform/base/core/oss.tf</a:t>
+              <a:t>2026-10-09  /  docs/oss-variant.md、docs/cycles/005-oss-on-ecs/design.md、IaC/terraform/oss/、IaC/terraform/aws-managed/base/core/oss.tf</a:t>
             </a:r>
           </a:p>
         </p:txBody>
@@ -4850,33 +5135,498 @@
           </a:fontRef>
         </p:style>
       </p:cxnSp>
-      <p:pic>
-        <p:nvPicPr>
-          <p:cNvPr id="5" name="Picture 4" descr="oss-overview.png"/>
-          <p:cNvPicPr>
-            <a:picLocks noChangeAspect="1"/>
-          </p:cNvPicPr>
+      <p:sp>
+        <p:nvSpPr>
+          <p:cNvPr id="5" name="TextBox 4"/>
+          <p:cNvSpPr txBox="1"/>
           <p:nvPr/>
-        </p:nvPicPr>
-        <p:blipFill>
-          <a:blip r:embed="rId2"/>
-          <a:stretch>
-            <a:fillRect/>
-          </a:stretch>
-        </p:blipFill>
+        </p:nvSpPr>
         <p:spPr>
           <a:xfrm>
             <a:off x="841248" y="1755648"/>
-            <a:ext cx="10509199" cy="3931219"/>
+            <a:ext cx="10509199" cy="393700"/>
           </a:xfrm>
           <a:prstGeom prst="rect">
             <a:avLst/>
           </a:prstGeom>
+          <a:noFill/>
         </p:spPr>
-      </p:pic>
+        <p:txBody>
+          <a:bodyPr wrap="square" lIns="0" rIns="0" tIns="0" bIns="0" anchor="t">
+            <a:spAutoFit/>
+          </a:bodyPr>
+          <a:lstStyle/>
+          <a:p>
+            <a:pPr>
+              <a:lnSpc>
+                <a:spcPct val="155000"/>
+              </a:lnSpc>
+            </a:pPr>
+            <a:r>
+              <a:rPr sz="2000" b="0" i="0">
+                <a:solidFill>
+                  <a:srgbClr val="1A1A1A"/>
+                </a:solidFill>
+                <a:latin typeface="Lato"/>
+                <a:ea typeface="Noto Sans JP"/>
+                <a:cs typeface="Noto Sans JP"/>
+              </a:rPr>
+              <a:t>接頭辞も state も別なので、マネージド版と名前はぶつからない。</a:t>
+            </a:r>
+          </a:p>
+        </p:txBody>
+      </p:sp>
       <p:sp>
         <p:nvSpPr>
           <p:cNvPr id="6" name="TextBox 5"/>
+          <p:cNvSpPr txBox="1"/>
+          <p:nvPr/>
+        </p:nvSpPr>
+        <p:spPr>
+          <a:xfrm>
+            <a:off x="841248" y="2387092"/>
+            <a:ext cx="5003140" cy="393700"/>
+          </a:xfrm>
+          <a:prstGeom prst="rect">
+            <a:avLst/>
+          </a:prstGeom>
+          <a:noFill/>
+        </p:spPr>
+        <p:txBody>
+          <a:bodyPr wrap="square" lIns="0" rIns="0" tIns="0" bIns="0" anchor="t">
+            <a:spAutoFit/>
+          </a:bodyPr>
+          <a:lstStyle/>
+          <a:p>
+            <a:pPr>
+              <a:lnSpc>
+                <a:spcPct val="155000"/>
+              </a:lnSpc>
+            </a:pPr>
+            <a:r>
+              <a:rPr sz="2000" b="1" i="0">
+                <a:solidFill>
+                  <a:srgbClr val="111110"/>
+                </a:solidFill>
+                <a:latin typeface="Lato"/>
+                <a:ea typeface="Noto Sans JP"/>
+                <a:cs typeface="Noto Sans JP"/>
+              </a:rPr>
+              <a:t>置き換えた 5 つ（ECS）</a:t>
+            </a:r>
+          </a:p>
+        </p:txBody>
+      </p:sp>
+      <p:sp>
+        <p:nvSpPr>
+          <p:cNvPr id="7" name="TextBox 6"/>
+          <p:cNvSpPr txBox="1"/>
+          <p:nvPr/>
+        </p:nvSpPr>
+        <p:spPr>
+          <a:xfrm>
+            <a:off x="841248" y="3018536"/>
+            <a:ext cx="5003140" cy="2527300"/>
+          </a:xfrm>
+          <a:prstGeom prst="rect">
+            <a:avLst/>
+          </a:prstGeom>
+          <a:noFill/>
+        </p:spPr>
+        <p:txBody>
+          <a:bodyPr wrap="square" lIns="0" rIns="0" tIns="0" bIns="0" anchor="t">
+            <a:spAutoFit/>
+          </a:bodyPr>
+          <a:lstStyle/>
+          <a:p>
+            <a:pPr marL="0" indent="0">
+              <a:lnSpc>
+                <a:spcPct val="155000"/>
+              </a:lnSpc>
+              <a:spcAft>
+                <a:spcPts val="880"/>
+              </a:spcAft>
+            </a:pPr>
+            <a:r>
+              <a:rPr sz="2000" b="0" i="0">
+                <a:solidFill>
+                  <a:srgbClr val="D63A2F"/>
+                </a:solidFill>
+                <a:latin typeface="Lato"/>
+                <a:ea typeface="Noto Sans JP"/>
+                <a:cs typeface="Noto Sans JP"/>
+              </a:rPr>
+              <a:t>・</a:t>
+            </a:r>
+            <a:r>
+              <a:rPr sz="2000" b="0" i="0">
+                <a:solidFill>
+                  <a:srgbClr val="1A1A1A"/>
+                </a:solidFill>
+                <a:latin typeface="Lato"/>
+                <a:ea typeface="Noto Sans JP"/>
+                <a:cs typeface="Noto Sans JP"/>
+              </a:rPr>
+              <a:t>Kafka</a:t>
+            </a:r>
+          </a:p>
+          <a:p>
+            <a:pPr marL="0" indent="0">
+              <a:lnSpc>
+                <a:spcPct val="155000"/>
+              </a:lnSpc>
+              <a:spcAft>
+                <a:spcPts val="880"/>
+              </a:spcAft>
+            </a:pPr>
+            <a:r>
+              <a:rPr sz="2000" b="0" i="0">
+                <a:solidFill>
+                  <a:srgbClr val="D63A2F"/>
+                </a:solidFill>
+                <a:latin typeface="Lato"/>
+                <a:ea typeface="Noto Sans JP"/>
+                <a:cs typeface="Noto Sans JP"/>
+              </a:rPr>
+              <a:t>・</a:t>
+            </a:r>
+            <a:r>
+              <a:rPr sz="2000" b="0" i="0">
+                <a:solidFill>
+                  <a:srgbClr val="1A1A1A"/>
+                </a:solidFill>
+                <a:latin typeface="Lato"/>
+                <a:ea typeface="Noto Sans JP"/>
+                <a:cs typeface="Noto Sans JP"/>
+              </a:rPr>
+              <a:t>Spark</a:t>
+            </a:r>
+          </a:p>
+          <a:p>
+            <a:pPr marL="0" indent="0">
+              <a:lnSpc>
+                <a:spcPct val="155000"/>
+              </a:lnSpc>
+              <a:spcAft>
+                <a:spcPts val="880"/>
+              </a:spcAft>
+            </a:pPr>
+            <a:r>
+              <a:rPr sz="2000" b="0" i="0">
+                <a:solidFill>
+                  <a:srgbClr val="D63A2F"/>
+                </a:solidFill>
+                <a:latin typeface="Lato"/>
+                <a:ea typeface="Noto Sans JP"/>
+                <a:cs typeface="Noto Sans JP"/>
+              </a:rPr>
+              <a:t>・</a:t>
+            </a:r>
+            <a:r>
+              <a:rPr sz="2000" b="0" i="0">
+                <a:solidFill>
+                  <a:srgbClr val="1A1A1A"/>
+                </a:solidFill>
+                <a:latin typeface="Lato"/>
+                <a:ea typeface="Noto Sans JP"/>
+                <a:cs typeface="Noto Sans JP"/>
+              </a:rPr>
+              <a:t>OpenSearch</a:t>
+            </a:r>
+          </a:p>
+          <a:p>
+            <a:pPr marL="0" indent="0">
+              <a:lnSpc>
+                <a:spcPct val="155000"/>
+              </a:lnSpc>
+              <a:spcAft>
+                <a:spcPts val="880"/>
+              </a:spcAft>
+            </a:pPr>
+            <a:r>
+              <a:rPr sz="2000" b="0" i="0">
+                <a:solidFill>
+                  <a:srgbClr val="D63A2F"/>
+                </a:solidFill>
+                <a:latin typeface="Lato"/>
+                <a:ea typeface="Noto Sans JP"/>
+                <a:cs typeface="Noto Sans JP"/>
+              </a:rPr>
+              <a:t>・</a:t>
+            </a:r>
+            <a:r>
+              <a:rPr sz="2000" b="0" i="0">
+                <a:solidFill>
+                  <a:srgbClr val="1A1A1A"/>
+                </a:solidFill>
+                <a:latin typeface="Lato"/>
+                <a:ea typeface="Noto Sans JP"/>
+                <a:cs typeface="Noto Sans JP"/>
+              </a:rPr>
+              <a:t>VictoriaMetrics</a:t>
+            </a:r>
+          </a:p>
+          <a:p>
+            <a:pPr marL="0" indent="0">
+              <a:lnSpc>
+                <a:spcPct val="155000"/>
+              </a:lnSpc>
+              <a:spcAft>
+                <a:spcPts val="880"/>
+              </a:spcAft>
+            </a:pPr>
+            <a:r>
+              <a:rPr sz="2000" b="0" i="0">
+                <a:solidFill>
+                  <a:srgbClr val="D63A2F"/>
+                </a:solidFill>
+                <a:latin typeface="Lato"/>
+                <a:ea typeface="Noto Sans JP"/>
+                <a:cs typeface="Noto Sans JP"/>
+              </a:rPr>
+              <a:t>・</a:t>
+            </a:r>
+            <a:r>
+              <a:rPr sz="2000" b="0" i="0">
+                <a:solidFill>
+                  <a:srgbClr val="1A1A1A"/>
+                </a:solidFill>
+                <a:latin typeface="Lato"/>
+                <a:ea typeface="Noto Sans JP"/>
+                <a:cs typeface="Noto Sans JP"/>
+              </a:rPr>
+              <a:t>Neo4j + GDS</a:t>
+            </a:r>
+          </a:p>
+        </p:txBody>
+      </p:sp>
+      <p:sp>
+        <p:nvSpPr>
+          <p:cNvPr id="8" name="TextBox 7"/>
+          <p:cNvSpPr txBox="1"/>
+          <p:nvPr/>
+        </p:nvSpPr>
+        <p:spPr>
+          <a:xfrm>
+            <a:off x="6347308" y="2387092"/>
+            <a:ext cx="5003140" cy="393700"/>
+          </a:xfrm>
+          <a:prstGeom prst="rect">
+            <a:avLst/>
+          </a:prstGeom>
+          <a:noFill/>
+        </p:spPr>
+        <p:txBody>
+          <a:bodyPr wrap="square" lIns="0" rIns="0" tIns="0" bIns="0" anchor="t">
+            <a:spAutoFit/>
+          </a:bodyPr>
+          <a:lstStyle/>
+          <a:p>
+            <a:pPr>
+              <a:lnSpc>
+                <a:spcPct val="155000"/>
+              </a:lnSpc>
+            </a:pPr>
+            <a:r>
+              <a:rPr sz="2000" b="1" i="0">
+                <a:solidFill>
+                  <a:srgbClr val="111110"/>
+                </a:solidFill>
+                <a:latin typeface="Lato"/>
+                <a:ea typeface="Noto Sans JP"/>
+                <a:cs typeface="Noto Sans JP"/>
+              </a:rPr>
+              <a:t>そのまま</a:t>
+            </a:r>
+          </a:p>
+        </p:txBody>
+      </p:sp>
+      <p:sp>
+        <p:nvSpPr>
+          <p:cNvPr id="9" name="TextBox 8"/>
+          <p:cNvSpPr txBox="1"/>
+          <p:nvPr/>
+        </p:nvSpPr>
+        <p:spPr>
+          <a:xfrm>
+            <a:off x="6347308" y="3018536"/>
+            <a:ext cx="5003140" cy="2527300"/>
+          </a:xfrm>
+          <a:prstGeom prst="rect">
+            <a:avLst/>
+          </a:prstGeom>
+          <a:noFill/>
+        </p:spPr>
+        <p:txBody>
+          <a:bodyPr wrap="square" lIns="0" rIns="0" tIns="0" bIns="0" anchor="t">
+            <a:spAutoFit/>
+          </a:bodyPr>
+          <a:lstStyle/>
+          <a:p>
+            <a:pPr marL="0" indent="0">
+              <a:lnSpc>
+                <a:spcPct val="155000"/>
+              </a:lnSpc>
+              <a:spcAft>
+                <a:spcPts val="880"/>
+              </a:spcAft>
+            </a:pPr>
+            <a:r>
+              <a:rPr sz="2000" b="0" i="0">
+                <a:solidFill>
+                  <a:srgbClr val="D63A2F"/>
+                </a:solidFill>
+                <a:latin typeface="Lato"/>
+                <a:ea typeface="Noto Sans JP"/>
+                <a:cs typeface="Noto Sans JP"/>
+              </a:rPr>
+              <a:t>・</a:t>
+            </a:r>
+            <a:r>
+              <a:rPr sz="2000" b="0" i="0">
+                <a:solidFill>
+                  <a:srgbClr val="1A1A1A"/>
+                </a:solidFill>
+                <a:latin typeface="Lato"/>
+                <a:ea typeface="Noto Sans JP"/>
+                <a:cs typeface="Noto Sans JP"/>
+              </a:rPr>
+              <a:t>lab と収集 4 種</a:t>
+            </a:r>
+          </a:p>
+          <a:p>
+            <a:pPr marL="0" indent="0">
+              <a:lnSpc>
+                <a:spcPct val="155000"/>
+              </a:lnSpc>
+              <a:spcAft>
+                <a:spcPts val="880"/>
+              </a:spcAft>
+            </a:pPr>
+            <a:r>
+              <a:rPr sz="2000" b="0" i="0">
+                <a:solidFill>
+                  <a:srgbClr val="D63A2F"/>
+                </a:solidFill>
+                <a:latin typeface="Lato"/>
+                <a:ea typeface="Noto Sans JP"/>
+                <a:cs typeface="Noto Sans JP"/>
+              </a:rPr>
+              <a:t>・</a:t>
+            </a:r>
+            <a:r>
+              <a:rPr sz="2000" b="0" i="0">
+                <a:solidFill>
+                  <a:srgbClr val="1A1A1A"/>
+                </a:solidFill>
+                <a:latin typeface="Lato"/>
+                <a:ea typeface="Noto Sans JP"/>
+                <a:cs typeface="Noto Sans JP"/>
+              </a:rPr>
+              <a:t>S3 Tables・Splunk</a:t>
+            </a:r>
+          </a:p>
+          <a:p>
+            <a:pPr marL="0" indent="0">
+              <a:lnSpc>
+                <a:spcPct val="155000"/>
+              </a:lnSpc>
+              <a:spcAft>
+                <a:spcPts val="880"/>
+              </a:spcAft>
+            </a:pPr>
+            <a:r>
+              <a:rPr sz="2000" b="0" i="0">
+                <a:solidFill>
+                  <a:srgbClr val="D63A2F"/>
+                </a:solidFill>
+                <a:latin typeface="Lato"/>
+                <a:ea typeface="Noto Sans JP"/>
+                <a:cs typeface="Noto Sans JP"/>
+              </a:rPr>
+              <a:t>・</a:t>
+            </a:r>
+            <a:r>
+              <a:rPr sz="2000" b="0" i="0">
+                <a:solidFill>
+                  <a:srgbClr val="1A1A1A"/>
+                </a:solidFill>
+                <a:latin typeface="Lato"/>
+                <a:ea typeface="Noto Sans JP"/>
+                <a:cs typeface="Noto Sans JP"/>
+              </a:rPr>
+              <a:t>SNS・SQS・Temporal</a:t>
+            </a:r>
+          </a:p>
+          <a:p>
+            <a:pPr marL="0" indent="0">
+              <a:lnSpc>
+                <a:spcPct val="155000"/>
+              </a:lnSpc>
+              <a:spcAft>
+                <a:spcPts val="880"/>
+              </a:spcAft>
+            </a:pPr>
+            <a:r>
+              <a:rPr sz="2000" b="0" i="0">
+                <a:solidFill>
+                  <a:srgbClr val="D63A2F"/>
+                </a:solidFill>
+                <a:latin typeface="Lato"/>
+                <a:ea typeface="Noto Sans JP"/>
+                <a:cs typeface="Noto Sans JP"/>
+              </a:rPr>
+              <a:t>・</a:t>
+            </a:r>
+            <a:r>
+              <a:rPr sz="2000" b="0" i="0">
+                <a:solidFill>
+                  <a:srgbClr val="1A1A1A"/>
+                </a:solidFill>
+                <a:latin typeface="Lato"/>
+                <a:ea typeface="Noto Sans JP"/>
+                <a:cs typeface="Noto Sans JP"/>
+              </a:rPr>
+              <a:t>エージェントと Web</a:t>
+            </a:r>
+          </a:p>
+          <a:p>
+            <a:pPr marL="0" indent="0">
+              <a:lnSpc>
+                <a:spcPct val="155000"/>
+              </a:lnSpc>
+              <a:spcAft>
+                <a:spcPts val="880"/>
+              </a:spcAft>
+            </a:pPr>
+            <a:r>
+              <a:rPr sz="2000" b="0" i="0">
+                <a:solidFill>
+                  <a:srgbClr val="D63A2F"/>
+                </a:solidFill>
+                <a:latin typeface="Lato"/>
+                <a:ea typeface="Noto Sans JP"/>
+                <a:cs typeface="Noto Sans JP"/>
+              </a:rPr>
+              <a:t>・</a:t>
+            </a:r>
+            <a:r>
+              <a:rPr sz="2000" b="0" i="0">
+                <a:solidFill>
+                  <a:srgbClr val="1A1A1A"/>
+                </a:solidFill>
+                <a:latin typeface="Lato"/>
+                <a:ea typeface="Noto Sans JP"/>
+                <a:cs typeface="Noto Sans JP"/>
+              </a:rPr>
+              <a:t>Nautobot と RDS</a:t>
+            </a:r>
+          </a:p>
+        </p:txBody>
+      </p:sp>
+      <p:sp>
+        <p:nvSpPr>
+          <p:cNvPr id="10" name="TextBox 9"/>
           <p:cNvSpPr txBox="1"/>
           <p:nvPr/>
         </p:nvSpPr>
@@ -5067,7 +5817,7 @@
         </p:nvGraphicFramePr>
         <p:xfrm>
           <a:off x="841248" y="1755648"/>
-          <a:ext cx="10509199" cy="2878936"/>
+          <a:ext cx="10509199" cy="3461512"/>
         </p:xfrm>
         <a:graphic>
           <a:graphicData uri="http://schemas.openxmlformats.org/drawingml/2006/table">
@@ -5078,7 +5828,7 @@
                 <a:gridCol w="3503066"/>
                 <a:gridCol w="3503067"/>
               </a:tblGrid>
-              <a:tr h="449072">
+              <a:tr h="538480">
                 <a:tc>
                   <a:txBody>
                     <a:bodyPr wrap="square"/>
@@ -5090,7 +5840,7 @@
                         </a:lnSpc>
                       </a:pPr>
                       <a:r>
-                        <a:rPr sz="1312" b="1" i="0">
+                        <a:rPr sz="1639" b="1" i="0">
                           <a:solidFill>
                             <a:srgbClr val="111110"/>
                           </a:solidFill>
@@ -5122,7 +5872,7 @@
                         </a:lnSpc>
                       </a:pPr>
                       <a:r>
-                        <a:rPr sz="1312" b="1" i="0">
+                        <a:rPr sz="1639" b="1" i="0">
                           <a:solidFill>
                             <a:srgbClr val="111110"/>
                           </a:solidFill>
@@ -5154,7 +5904,7 @@
                         </a:lnSpc>
                       </a:pPr>
                       <a:r>
-                        <a:rPr sz="1312" b="1" i="0">
+                        <a:rPr sz="1639" b="1" i="0">
                           <a:solidFill>
                             <a:srgbClr val="111110"/>
                           </a:solidFill>
@@ -5176,7 +5926,7 @@
                   </a:tcPr>
                 </a:tc>
               </a:tr>
-              <a:tr h="449072">
+              <a:tr h="538480">
                 <a:tc>
                   <a:txBody>
                     <a:bodyPr wrap="square"/>
@@ -5188,7 +5938,7 @@
                         </a:lnSpc>
                       </a:pPr>
                       <a:r>
-                        <a:rPr sz="1312" b="0" i="0">
+                        <a:rPr sz="1639" b="0" i="0">
                           <a:solidFill>
                             <a:srgbClr val="1A1A1A"/>
                           </a:solidFill>
@@ -5220,7 +5970,7 @@
                         </a:lnSpc>
                       </a:pPr>
                       <a:r>
-                        <a:rPr sz="1312" b="0" i="0">
+                        <a:rPr sz="1639" b="0" i="0">
                           <a:solidFill>
                             <a:srgbClr val="1A1A1A"/>
                           </a:solidFill>
@@ -5252,7 +6002,7 @@
                         </a:lnSpc>
                       </a:pPr>
                       <a:r>
-                        <a:rPr sz="1312" b="0" i="0">
+                        <a:rPr sz="1639" b="0" i="0">
                           <a:solidFill>
                             <a:srgbClr val="1A1A1A"/>
                           </a:solidFill>
@@ -5260,7 +6010,7 @@
                           <a:ea typeface="Noto Sans JP"/>
                           <a:cs typeface="Noto Sans JP"/>
                         </a:rPr>
-                        <a:t>Apache Kafka（KRaft）</a:t>
+                        <a:t>Kafka（KRaft）</a:t>
                       </a:r>
                     </a:p>
                   </a:txBody>
@@ -5274,7 +6024,7 @@
                   </a:tcPr>
                 </a:tc>
               </a:tr>
-              <a:tr h="449072">
+              <a:tr h="538480">
                 <a:tc>
                   <a:txBody>
                     <a:bodyPr wrap="square"/>
@@ -5286,7 +6036,7 @@
                         </a:lnSpc>
                       </a:pPr>
                       <a:r>
-                        <a:rPr sz="1312" b="0" i="0">
+                        <a:rPr sz="1639" b="0" i="0">
                           <a:solidFill>
                             <a:srgbClr val="1A1A1A"/>
                           </a:solidFill>
@@ -5318,7 +6068,7 @@
                         </a:lnSpc>
                       </a:pPr>
                       <a:r>
-                        <a:rPr sz="1312" b="0" i="0">
+                        <a:rPr sz="1639" b="0" i="0">
                           <a:solidFill>
                             <a:srgbClr val="1A1A1A"/>
                           </a:solidFill>
@@ -5350,7 +6100,7 @@
                         </a:lnSpc>
                       </a:pPr>
                       <a:r>
-                        <a:rPr sz="1312" b="0" i="0">
+                        <a:rPr sz="1639" b="0" i="0">
                           <a:solidFill>
                             <a:srgbClr val="1A1A1A"/>
                           </a:solidFill>
@@ -5358,7 +6108,7 @@
                           <a:ea typeface="Noto Sans JP"/>
                           <a:cs typeface="Noto Sans JP"/>
                         </a:rPr>
-                        <a:t>Apache Spark 3.5</a:t>
+                        <a:t>Spark 3.5</a:t>
                       </a:r>
                     </a:p>
                   </a:txBody>
@@ -5372,7 +6122,7 @@
                   </a:tcPr>
                 </a:tc>
               </a:tr>
-              <a:tr h="541324">
+              <a:tr h="653796">
                 <a:tc>
                   <a:txBody>
                     <a:bodyPr wrap="square"/>
@@ -5384,7 +6134,7 @@
                         </a:lnSpc>
                       </a:pPr>
                       <a:r>
-                        <a:rPr sz="1312" b="0" i="0">
+                        <a:rPr sz="1639" b="0" i="0">
                           <a:solidFill>
                             <a:srgbClr val="1A1A1A"/>
                           </a:solidFill>
@@ -5416,7 +6166,7 @@
                         </a:lnSpc>
                       </a:pPr>
                       <a:r>
-                        <a:rPr sz="1312" b="0" i="0">
+                        <a:rPr sz="1639" b="0" i="0">
                           <a:solidFill>
                             <a:srgbClr val="1A1A1A"/>
                           </a:solidFill>
@@ -5448,7 +6198,7 @@
                         </a:lnSpc>
                       </a:pPr>
                       <a:r>
-                        <a:rPr sz="1312" b="0" i="0">
+                        <a:rPr sz="1639" b="0" i="0">
                           <a:solidFill>
                             <a:srgbClr val="1A1A1A"/>
                           </a:solidFill>
@@ -5470,7 +6220,7 @@
                   </a:tcPr>
                 </a:tc>
               </a:tr>
-              <a:tr h="541324">
+              <a:tr h="538480">
                 <a:tc>
                   <a:txBody>
                     <a:bodyPr wrap="square"/>
@@ -5482,7 +6232,7 @@
                         </a:lnSpc>
                       </a:pPr>
                       <a:r>
-                        <a:rPr sz="1312" b="0" i="0">
+                        <a:rPr sz="1639" b="0" i="0">
                           <a:solidFill>
                             <a:srgbClr val="1A1A1A"/>
                           </a:solidFill>
@@ -5514,7 +6264,7 @@
                         </a:lnSpc>
                       </a:pPr>
                       <a:r>
-                        <a:rPr sz="1312" b="0" i="0">
+                        <a:rPr sz="1639" b="0" i="0">
                           <a:solidFill>
                             <a:srgbClr val="1A1A1A"/>
                           </a:solidFill>
@@ -5546,7 +6296,7 @@
                         </a:lnSpc>
                       </a:pPr>
                       <a:r>
-                        <a:rPr sz="1312" b="0" i="0">
+                        <a:rPr sz="1639" b="0" i="0">
                           <a:solidFill>
                             <a:srgbClr val="1A1A1A"/>
                           </a:solidFill>
@@ -5554,7 +6304,7 @@
                           <a:ea typeface="Noto Sans JP"/>
                           <a:cs typeface="Noto Sans JP"/>
                         </a:rPr>
-                        <a:t>VictoriaMetrics のクラスター</a:t>
+                        <a:t>VictoriaMetrics</a:t>
                       </a:r>
                     </a:p>
                   </a:txBody>
@@ -5568,7 +6318,7 @@
                   </a:tcPr>
                 </a:tc>
               </a:tr>
-              <a:tr h="449072">
+              <a:tr h="653796">
                 <a:tc>
                   <a:txBody>
                     <a:bodyPr wrap="square"/>
@@ -5580,7 +6330,7 @@
                         </a:lnSpc>
                       </a:pPr>
                       <a:r>
-                        <a:rPr sz="1312" b="0" i="0">
+                        <a:rPr sz="1639" b="0" i="0">
                           <a:solidFill>
                             <a:srgbClr val="1A1A1A"/>
                           </a:solidFill>
@@ -5612,7 +6362,7 @@
                         </a:lnSpc>
                       </a:pPr>
                       <a:r>
-                        <a:rPr sz="1312" b="0" i="0">
+                        <a:rPr sz="1639" b="0" i="0">
                           <a:solidFill>
                             <a:srgbClr val="1A1A1A"/>
                           </a:solidFill>
@@ -5644,7 +6394,7 @@
                         </a:lnSpc>
                       </a:pPr>
                       <a:r>
-                        <a:rPr sz="1312" b="0" i="0">
+                        <a:rPr sz="1639" b="0" i="0">
                           <a:solidFill>
                             <a:srgbClr val="1A1A1A"/>
                           </a:solidFill>
@@ -5678,8 +6428,8 @@
         </p:nvSpPr>
         <p:spPr>
           <a:xfrm>
-            <a:off x="841248" y="4872328"/>
-            <a:ext cx="10509199" cy="629920"/>
+            <a:off x="841248" y="5454904"/>
+            <a:ext cx="10509199" cy="393700"/>
           </a:xfrm>
           <a:prstGeom prst="rect">
             <a:avLst/>
@@ -5698,7 +6448,7 @@
               </a:lnSpc>
             </a:pPr>
             <a:r>
-              <a:rPr sz="1600" b="0" i="0">
+              <a:rPr sz="2000" b="0" i="0">
                 <a:solidFill>
                   <a:srgbClr val="1A1A1A"/>
                 </a:solidFill>
@@ -5706,7 +6456,7 @@
                 <a:ea typeface="Noto Sans JP"/>
                 <a:cs typeface="Noto Sans JP"/>
               </a:rPr>
-              <a:t>変えないもの: AgentCore・Bedrock・KB・S3 Tables・RDS・SNS・SQS・Lambda・SSM・閉域。</a:t>
+              <a:t>そのほか（AgentCore・S3 Tables・SNS など）は変えない。</a:t>
             </a:r>
           </a:p>
         </p:txBody>
@@ -5903,7 +6653,7 @@
         <p:spPr>
           <a:xfrm>
             <a:off x="841248" y="1755648"/>
-            <a:ext cx="10509199" cy="314960"/>
+            <a:ext cx="10509199" cy="393700"/>
           </a:xfrm>
           <a:prstGeom prst="rect">
             <a:avLst/>
@@ -5922,7 +6672,7 @@
               </a:lnSpc>
             </a:pPr>
             <a:r>
-              <a:rPr sz="1600" b="0" i="0">
+              <a:rPr sz="2000" b="0" i="0">
                 <a:solidFill>
                   <a:srgbClr val="1A1A1A"/>
                 </a:solidFill>
@@ -5930,7 +6680,7 @@
                 <a:ea typeface="Noto Sans JP"/>
                 <a:cs typeface="Noto Sans JP"/>
               </a:rPr>
-              <a:t>これに Kafbat UI がもう 1 個。数字はタスク 1 つの vCPU / メモリの既定値。</a:t>
+              <a:t>数字はタスク 1 つの vCPU / メモリの既定値。</a:t>
             </a:r>
           </a:p>
         </p:txBody>
@@ -5944,8 +6694,8 @@
           <p:nvPr/>
         </p:nvGraphicFramePr>
         <p:xfrm>
-          <a:off x="841248" y="2308352"/>
-          <a:ext cx="10509199" cy="2878936"/>
+          <a:off x="841248" y="2387092"/>
+          <a:ext cx="10509199" cy="3346196"/>
         </p:xfrm>
         <a:graphic>
           <a:graphicData uri="http://schemas.openxmlformats.org/drawingml/2006/table">
@@ -5957,7 +6707,7 @@
                 <a:gridCol w="2627299"/>
                 <a:gridCol w="2627302"/>
               </a:tblGrid>
-              <a:tr h="449072">
+              <a:tr h="538480">
                 <a:tc>
                   <a:txBody>
                     <a:bodyPr wrap="square"/>
@@ -5969,7 +6719,7 @@
                         </a:lnSpc>
                       </a:pPr>
                       <a:r>
-                        <a:rPr sz="1312" b="1" i="0">
+                        <a:rPr sz="1639" b="1" i="0">
                           <a:solidFill>
                             <a:srgbClr val="111110"/>
                           </a:solidFill>
@@ -6001,7 +6751,7 @@
                         </a:lnSpc>
                       </a:pPr>
                       <a:r>
-                        <a:rPr sz="1312" b="1" i="0">
+                        <a:rPr sz="1639" b="1" i="0">
                           <a:solidFill>
                             <a:srgbClr val="111110"/>
                           </a:solidFill>
@@ -6033,7 +6783,7 @@
                         </a:lnSpc>
                       </a:pPr>
                       <a:r>
-                        <a:rPr sz="1312" b="1" i="0">
+                        <a:rPr sz="1639" b="1" i="0">
                           <a:solidFill>
                             <a:srgbClr val="111110"/>
                           </a:solidFill>
@@ -6065,7 +6815,7 @@
                         </a:lnSpc>
                       </a:pPr>
                       <a:r>
-                        <a:rPr sz="1312" b="1" i="0">
+                        <a:rPr sz="1639" b="1" i="0">
                           <a:solidFill>
                             <a:srgbClr val="111110"/>
                           </a:solidFill>
@@ -6087,7 +6837,7 @@
                   </a:tcPr>
                 </a:tc>
               </a:tr>
-              <a:tr h="449072">
+              <a:tr h="538480">
                 <a:tc>
                   <a:txBody>
                     <a:bodyPr wrap="square"/>
@@ -6099,7 +6849,7 @@
                         </a:lnSpc>
                       </a:pPr>
                       <a:r>
-                        <a:rPr sz="1312" b="0" i="0">
+                        <a:rPr sz="1639" b="0" i="0">
                           <a:solidFill>
                             <a:srgbClr val="1A1A1A"/>
                           </a:solidFill>
@@ -6125,13 +6875,13 @@
                     <a:bodyPr wrap="square"/>
                     <a:lstStyle/>
                     <a:p>
-                      <a:pPr>
+                      <a:pPr algn="r">
                         <a:lnSpc>
                           <a:spcPct val="135000"/>
                         </a:lnSpc>
                       </a:pPr>
                       <a:r>
-                        <a:rPr sz="1312" b="0" i="0">
+                        <a:rPr sz="1639" b="0" i="0">
                           <a:solidFill>
                             <a:srgbClr val="1A1A1A"/>
                           </a:solidFill>
@@ -6139,7 +6889,7 @@
                           <a:ea typeface="Noto Sans JP"/>
                           <a:cs typeface="Noto Sans JP"/>
                         </a:rPr>
-                        <a:t>3（AZ に 1 つ）</a:t>
+                        <a:t>3</a:t>
                       </a:r>
                     </a:p>
                   </a:txBody>
@@ -6163,7 +6913,7 @@
                         </a:lnSpc>
                       </a:pPr>
                       <a:r>
-                        <a:rPr sz="1312" b="0" i="0">
+                        <a:rPr sz="1639" b="0" i="0">
                           <a:solidFill>
                             <a:srgbClr val="1A1A1A"/>
                           </a:solidFill>
@@ -6195,7 +6945,7 @@
                         </a:lnSpc>
                       </a:pPr>
                       <a:r>
-                        <a:rPr sz="1312" b="0" i="0">
+                        <a:rPr sz="1639" b="0" i="0">
                           <a:solidFill>
                             <a:srgbClr val="1A1A1A"/>
                           </a:solidFill>
@@ -6217,7 +6967,7 @@
                   </a:tcPr>
                 </a:tc>
               </a:tr>
-              <a:tr h="449072">
+              <a:tr h="538480">
                 <a:tc>
                   <a:txBody>
                     <a:bodyPr wrap="square"/>
@@ -6229,7 +6979,7 @@
                         </a:lnSpc>
                       </a:pPr>
                       <a:r>
-                        <a:rPr sz="1312" b="0" i="0">
+                        <a:rPr sz="1639" b="0" i="0">
                           <a:solidFill>
                             <a:srgbClr val="1A1A1A"/>
                           </a:solidFill>
@@ -6255,13 +7005,13 @@
                     <a:bodyPr wrap="square"/>
                     <a:lstStyle/>
                     <a:p>
-                      <a:pPr>
+                      <a:pPr algn="r">
                         <a:lnSpc>
                           <a:spcPct val="135000"/>
                         </a:lnSpc>
                       </a:pPr>
                       <a:r>
-                        <a:rPr sz="1312" b="0" i="0">
+                        <a:rPr sz="1639" b="0" i="0">
                           <a:solidFill>
                             <a:srgbClr val="1A1A1A"/>
                           </a:solidFill>
@@ -6269,7 +7019,7 @@
                           <a:ea typeface="Noto Sans JP"/>
                           <a:cs typeface="Noto Sans JP"/>
                         </a:rPr>
-                        <a:t>3（ジョブに 1 つ）</a:t>
+                        <a:t>3</a:t>
                       </a:r>
                     </a:p>
                   </a:txBody>
@@ -6293,7 +7043,7 @@
                         </a:lnSpc>
                       </a:pPr>
                       <a:r>
-                        <a:rPr sz="1312" b="0" i="0">
+                        <a:rPr sz="1639" b="0" i="0">
                           <a:solidFill>
                             <a:srgbClr val="1A1A1A"/>
                           </a:solidFill>
@@ -6325,7 +7075,7 @@
                         </a:lnSpc>
                       </a:pPr>
                       <a:r>
-                        <a:rPr sz="1312" b="0" i="0">
+                        <a:rPr sz="1639" b="0" i="0">
                           <a:solidFill>
                             <a:srgbClr val="1A1A1A"/>
                           </a:solidFill>
@@ -6333,7 +7083,7 @@
                           <a:ea typeface="Noto Sans JP"/>
                           <a:cs typeface="Noto Sans JP"/>
                         </a:rPr>
-                        <a:t>S3（checkpoint）</a:t>
+                        <a:t>S3</a:t>
                       </a:r>
                     </a:p>
                   </a:txBody>
@@ -6347,7 +7097,7 @@
                   </a:tcPr>
                 </a:tc>
               </a:tr>
-              <a:tr h="541324">
+              <a:tr h="538480">
                 <a:tc>
                   <a:txBody>
                     <a:bodyPr wrap="square"/>
@@ -6359,7 +7109,7 @@
                         </a:lnSpc>
                       </a:pPr>
                       <a:r>
-                        <a:rPr sz="1312" b="0" i="0">
+                        <a:rPr sz="1639" b="0" i="0">
                           <a:solidFill>
                             <a:srgbClr val="1A1A1A"/>
                           </a:solidFill>
@@ -6385,13 +7135,13 @@
                     <a:bodyPr wrap="square"/>
                     <a:lstStyle/>
                     <a:p>
-                      <a:pPr>
+                      <a:pPr algn="r">
                         <a:lnSpc>
                           <a:spcPct val="135000"/>
                         </a:lnSpc>
                       </a:pPr>
                       <a:r>
-                        <a:rPr sz="1312" b="0" i="0">
+                        <a:rPr sz="1639" b="0" i="0">
                           <a:solidFill>
                             <a:srgbClr val="1A1A1A"/>
                           </a:solidFill>
@@ -6399,7 +7149,7 @@
                           <a:ea typeface="Noto Sans JP"/>
                           <a:cs typeface="Noto Sans JP"/>
                         </a:rPr>
-                        <a:t>3（データ 2・まとめ役 1）</a:t>
+                        <a:t>3</a:t>
                       </a:r>
                     </a:p>
                   </a:txBody>
@@ -6423,7 +7173,7 @@
                         </a:lnSpc>
                       </a:pPr>
                       <a:r>
-                        <a:rPr sz="1312" b="0" i="0">
+                        <a:rPr sz="1639" b="0" i="0">
                           <a:solidFill>
                             <a:srgbClr val="1A1A1A"/>
                           </a:solidFill>
@@ -6431,7 +7181,7 @@
                           <a:ea typeface="Noto Sans JP"/>
                           <a:cs typeface="Noto Sans JP"/>
                         </a:rPr>
-                        <a:t>1 / 4 GB・0.5 / 1 GB</a:t>
+                        <a:t>1 / 4 GB ほか</a:t>
                       </a:r>
                     </a:p>
                   </a:txBody>
@@ -6455,7 +7205,7 @@
                         </a:lnSpc>
                       </a:pPr>
                       <a:r>
-                        <a:rPr sz="1312" b="0" i="0">
+                        <a:rPr sz="1639" b="0" i="0">
                           <a:solidFill>
                             <a:srgbClr val="1A1A1A"/>
                           </a:solidFill>
@@ -6463,7 +7213,7 @@
                           <a:ea typeface="Noto Sans JP"/>
                           <a:cs typeface="Noto Sans JP"/>
                         </a:rPr>
-                        <a:t>タスクの一時領域</a:t>
+                        <a:t>一時領域</a:t>
                       </a:r>
                     </a:p>
                   </a:txBody>
@@ -6477,7 +7227,7 @@
                   </a:tcPr>
                 </a:tc>
               </a:tr>
-              <a:tr h="541324">
+              <a:tr h="653796">
                 <a:tc>
                   <a:txBody>
                     <a:bodyPr wrap="square"/>
@@ -6489,7 +7239,7 @@
                         </a:lnSpc>
                       </a:pPr>
                       <a:r>
-                        <a:rPr sz="1312" b="0" i="0">
+                        <a:rPr sz="1639" b="0" i="0">
                           <a:solidFill>
                             <a:srgbClr val="1A1A1A"/>
                           </a:solidFill>
@@ -6515,13 +7265,13 @@
                     <a:bodyPr wrap="square"/>
                     <a:lstStyle/>
                     <a:p>
-                      <a:pPr>
+                      <a:pPr algn="r">
                         <a:lnSpc>
                           <a:spcPct val="135000"/>
                         </a:lnSpc>
                       </a:pPr>
                       <a:r>
-                        <a:rPr sz="1312" b="0" i="0">
+                        <a:rPr sz="1639" b="0" i="0">
                           <a:solidFill>
                             <a:srgbClr val="1A1A1A"/>
                           </a:solidFill>
@@ -6529,7 +7279,7 @@
                           <a:ea typeface="Noto Sans JP"/>
                           <a:cs typeface="Noto Sans JP"/>
                         </a:rPr>
-                        <a:t>5（うち storage 3）</a:t>
+                        <a:t>5</a:t>
                       </a:r>
                     </a:p>
                   </a:txBody>
@@ -6553,7 +7303,7 @@
                         </a:lnSpc>
                       </a:pPr>
                       <a:r>
-                        <a:rPr sz="1312" b="0" i="0">
+                        <a:rPr sz="1639" b="0" i="0">
                           <a:solidFill>
                             <a:srgbClr val="1A1A1A"/>
                           </a:solidFill>
@@ -6585,7 +7335,7 @@
                         </a:lnSpc>
                       </a:pPr>
                       <a:r>
-                        <a:rPr sz="1312" b="0" i="0">
+                        <a:rPr sz="1639" b="0" i="0">
                           <a:solidFill>
                             <a:srgbClr val="1A1A1A"/>
                           </a:solidFill>
@@ -6607,7 +7357,7 @@
                   </a:tcPr>
                 </a:tc>
               </a:tr>
-              <a:tr h="449072">
+              <a:tr h="538480">
                 <a:tc>
                   <a:txBody>
                     <a:bodyPr wrap="square"/>
@@ -6619,7 +7369,7 @@
                         </a:lnSpc>
                       </a:pPr>
                       <a:r>
-                        <a:rPr sz="1312" b="0" i="0">
+                        <a:rPr sz="1639" b="0" i="0">
                           <a:solidFill>
                             <a:srgbClr val="1A1A1A"/>
                           </a:solidFill>
@@ -6645,13 +7395,13 @@
                     <a:bodyPr wrap="square"/>
                     <a:lstStyle/>
                     <a:p>
-                      <a:pPr>
+                      <a:pPr algn="r">
                         <a:lnSpc>
                           <a:spcPct val="135000"/>
                         </a:lnSpc>
                       </a:pPr>
                       <a:r>
-                        <a:rPr sz="1312" b="0" i="0">
+                        <a:rPr sz="1639" b="0" i="0">
                           <a:solidFill>
                             <a:srgbClr val="1A1A1A"/>
                           </a:solidFill>
@@ -6659,7 +7409,7 @@
                           <a:ea typeface="Noto Sans JP"/>
                           <a:cs typeface="Noto Sans JP"/>
                         </a:rPr>
-                        <a:t>1（単独）</a:t>
+                        <a:t>1</a:t>
                       </a:r>
                     </a:p>
                   </a:txBody>
@@ -6683,7 +7433,7 @@
                         </a:lnSpc>
                       </a:pPr>
                       <a:r>
-                        <a:rPr sz="1312" b="0" i="0">
+                        <a:rPr sz="1639" b="0" i="0">
                           <a:solidFill>
                             <a:srgbClr val="1A1A1A"/>
                           </a:solidFill>
@@ -6715,7 +7465,7 @@
                         </a:lnSpc>
                       </a:pPr>
                       <a:r>
-                        <a:rPr sz="1312" b="0" i="0">
+                        <a:rPr sz="1639" b="0" i="0">
                           <a:solidFill>
                             <a:srgbClr val="1A1A1A"/>
                           </a:solidFill>
@@ -6723,7 +7473,7 @@
                           <a:ea typeface="Noto Sans JP"/>
                           <a:cs typeface="Noto Sans JP"/>
                         </a:rPr>
-                        <a:t>タスクの一時領域</a:t>
+                        <a:t>一時領域</a:t>
                       </a:r>
                     </a:p>
                   </a:txBody>
@@ -6933,7 +7683,7 @@
         <p:spPr>
           <a:xfrm>
             <a:off x="841248" y="1755648"/>
-            <a:ext cx="10509199" cy="708660"/>
+            <a:ext cx="10509199" cy="787400"/>
           </a:xfrm>
           <a:prstGeom prst="rect">
             <a:avLst/>
@@ -6952,7 +7702,7 @@
               </a:lnSpc>
             </a:pPr>
             <a:r>
-              <a:rPr sz="1800" b="0" i="0">
+              <a:rPr sz="2000" b="0" i="0">
                 <a:solidFill>
                   <a:srgbClr val="1A1A1A"/>
                 </a:solidFill>
@@ -6960,7 +7710,7 @@
                 <a:ea typeface="Noto Sans JP"/>
                 <a:cs typeface="Noto Sans JP"/>
               </a:rPr>
-              <a:t>ほかの 6 つは terraform/ へのシンボリックリンクに oss.auto.tfvars を足しただけ。数は resource ブロックの数。</a:t>
+              <a:t>置き場は IaC/terraform/oss/。ほかの 6 つは aws-managed/ へのリンクだけ。</a:t>
             </a:r>
           </a:p>
         </p:txBody>
@@ -6974,8 +7724,8 @@
           <p:nvPr/>
         </p:nvGraphicFramePr>
         <p:xfrm>
-          <a:off x="841248" y="2702052"/>
-          <a:ext cx="10509199" cy="3033292"/>
+          <a:off x="841248" y="2780792"/>
+          <a:ext cx="10509199" cy="2807716"/>
         </p:xfrm>
         <a:graphic>
           <a:graphicData uri="http://schemas.openxmlformats.org/drawingml/2006/table">
@@ -6986,7 +7736,7 @@
                 <a:gridCol w="3503066"/>
                 <a:gridCol w="3503067"/>
               </a:tblGrid>
-              <a:tr h="493776">
+              <a:tr h="538480">
                 <a:tc>
                   <a:txBody>
                     <a:bodyPr wrap="square"/>
@@ -6998,7 +7748,7 @@
                         </a:lnSpc>
                       </a:pPr>
                       <a:r>
-                        <a:rPr sz="1476" b="1" i="0">
+                        <a:rPr sz="1639" b="1" i="0">
                           <a:solidFill>
                             <a:srgbClr val="111110"/>
                           </a:solidFill>
@@ -7030,7 +7780,7 @@
                         </a:lnSpc>
                       </a:pPr>
                       <a:r>
-                        <a:rPr sz="1476" b="1" i="0">
+                        <a:rPr sz="1639" b="1" i="0">
                           <a:solidFill>
                             <a:srgbClr val="111110"/>
                           </a:solidFill>
@@ -7062,7 +7812,7 @@
                         </a:lnSpc>
                       </a:pPr>
                       <a:r>
-                        <a:rPr sz="1476" b="1" i="0">
+                        <a:rPr sz="1639" b="1" i="0">
                           <a:solidFill>
                             <a:srgbClr val="111110"/>
                           </a:solidFill>
@@ -7084,7 +7834,7 @@
                   </a:tcPr>
                 </a:tc>
               </a:tr>
-              <a:tr h="597560">
+              <a:tr h="538480">
                 <a:tc>
                   <a:txBody>
                     <a:bodyPr wrap="square"/>
@@ -7096,7 +7846,7 @@
                         </a:lnSpc>
                       </a:pPr>
                       <a:r>
-                        <a:rPr sz="1476" b="0" i="0">
+                        <a:rPr sz="1639" b="0" i="0">
                           <a:solidFill>
                             <a:srgbClr val="1A1A1A"/>
                           </a:solidFill>
@@ -7128,7 +7878,7 @@
                         </a:lnSpc>
                       </a:pPr>
                       <a:r>
-                        <a:rPr sz="1476" b="0" i="0">
+                        <a:rPr sz="1639" b="0" i="0">
                           <a:solidFill>
                             <a:srgbClr val="1A1A1A"/>
                           </a:solidFill>
@@ -7136,7 +7886,7 @@
                           <a:ea typeface="Noto Sans JP"/>
                           <a:cs typeface="Noto Sans JP"/>
                         </a:rPr>
-                        <a:t>MSK → Kafka（kafka.tf）</a:t>
+                        <a:t>MSK → Kafka</a:t>
                       </a:r>
                     </a:p>
                   </a:txBody>
@@ -7160,7 +7910,7 @@
                         </a:lnSpc>
                       </a:pPr>
                       <a:r>
-                        <a:rPr sz="1476" b="0" i="0">
+                        <a:rPr sz="1639" b="0" i="0">
                           <a:solidFill>
                             <a:srgbClr val="1A1A1A"/>
                           </a:solidFill>
@@ -7168,7 +7918,7 @@
                           <a:ea typeface="Noto Sans JP"/>
                           <a:cs typeface="Noto Sans JP"/>
                         </a:rPr>
-                        <a:t>46</a:t>
+                        <a:t>66</a:t>
                       </a:r>
                     </a:p>
                   </a:txBody>
@@ -7182,7 +7932,7 @@
                   </a:tcPr>
                 </a:tc>
               </a:tr>
-              <a:tr h="597560">
+              <a:tr h="538480">
                 <a:tc>
                   <a:txBody>
                     <a:bodyPr wrap="square"/>
@@ -7194,7 +7944,7 @@
                         </a:lnSpc>
                       </a:pPr>
                       <a:r>
-                        <a:rPr sz="1476" b="0" i="0">
+                        <a:rPr sz="1639" b="0" i="0">
                           <a:solidFill>
                             <a:srgbClr val="1A1A1A"/>
                           </a:solidFill>
@@ -7226,7 +7976,7 @@
                         </a:lnSpc>
                       </a:pPr>
                       <a:r>
-                        <a:rPr sz="1476" b="0" i="0">
+                        <a:rPr sz="1639" b="0" i="0">
                           <a:solidFill>
                             <a:srgbClr val="1A1A1A"/>
                           </a:solidFill>
@@ -7234,7 +7984,7 @@
                           <a:ea typeface="Noto Sans JP"/>
                           <a:cs typeface="Noto Sans JP"/>
                         </a:rPr>
-                        <a:t>Neptune → Neo4j（neo4j.tf・sync.tf）</a:t>
+                        <a:t>Neptune → Neo4j</a:t>
                       </a:r>
                     </a:p>
                   </a:txBody>
@@ -7258,7 +8008,7 @@
                         </a:lnSpc>
                       </a:pPr>
                       <a:r>
-                        <a:rPr sz="1476" b="0" i="0">
+                        <a:rPr sz="1639" b="0" i="0">
                           <a:solidFill>
                             <a:srgbClr val="1A1A1A"/>
                           </a:solidFill>
@@ -7280,7 +8030,7 @@
                   </a:tcPr>
                 </a:tc>
               </a:tr>
-              <a:tr h="850620">
+              <a:tr h="653796">
                 <a:tc>
                   <a:txBody>
                     <a:bodyPr wrap="square"/>
@@ -7292,7 +8042,7 @@
                         </a:lnSpc>
                       </a:pPr>
                       <a:r>
-                        <a:rPr sz="1476" b="0" i="0">
+                        <a:rPr sz="1639" b="0" i="0">
                           <a:solidFill>
                             <a:srgbClr val="1A1A1A"/>
                           </a:solidFill>
@@ -7324,7 +8074,7 @@
                         </a:lnSpc>
                       </a:pPr>
                       <a:r>
-                        <a:rPr sz="1476" b="0" i="0">
+                        <a:rPr sz="1639" b="0" i="0">
                           <a:solidFill>
                             <a:srgbClr val="1A1A1A"/>
                           </a:solidFill>
@@ -7332,7 +8082,7 @@
                           <a:ea typeface="Noto Sans JP"/>
                           <a:cs typeface="Noto Sans JP"/>
                         </a:rPr>
-                        <a:t>EMR・OpenSearch・AMP → ECS（spark.tf ほか）</a:t>
+                        <a:t>EMR・OpenSearch・AMP → ECS</a:t>
                       </a:r>
                     </a:p>
                   </a:txBody>
@@ -7356,7 +8106,7 @@
                         </a:lnSpc>
                       </a:pPr>
                       <a:r>
-                        <a:rPr sz="1476" b="0" i="0">
+                        <a:rPr sz="1639" b="0" i="0">
                           <a:solidFill>
                             <a:srgbClr val="1A1A1A"/>
                           </a:solidFill>
@@ -7378,7 +8128,7 @@
                   </a:tcPr>
                 </a:tc>
               </a:tr>
-              <a:tr h="493776">
+              <a:tr h="538480">
                 <a:tc>
                   <a:txBody>
                     <a:bodyPr wrap="square"/>
@@ -7390,7 +8140,7 @@
                         </a:lnSpc>
                       </a:pPr>
                       <a:r>
-                        <a:rPr sz="1476" b="0" i="0">
+                        <a:rPr sz="1639" b="0" i="0">
                           <a:solidFill>
                             <a:srgbClr val="1A1A1A"/>
                           </a:solidFill>
@@ -7422,7 +8172,7 @@
                         </a:lnSpc>
                       </a:pPr>
                       <a:r>
-                        <a:rPr sz="1476" b="0" i="0">
+                        <a:rPr sz="1639" b="0" i="0">
                           <a:solidFill>
                             <a:srgbClr val="1A1A1A"/>
                           </a:solidFill>
@@ -7454,7 +8204,7 @@
                         </a:lnSpc>
                       </a:pPr>
                       <a:r>
-                        <a:rPr sz="1476" b="0" i="0">
+                        <a:rPr sz="1639" b="0" i="0">
                           <a:solidFill>
                             <a:srgbClr val="1A1A1A"/>
                           </a:solidFill>
@@ -7663,30 +8413,221 @@
           </a:fontRef>
         </p:style>
       </p:cxnSp>
-      <p:pic>
-        <p:nvPicPr>
-          <p:cNvPr id="5" name="Picture 4" descr="oss-flow.png"/>
-          <p:cNvPicPr>
-            <a:picLocks noChangeAspect="1"/>
-          </p:cNvPicPr>
+      <p:sp>
+        <p:nvSpPr>
+          <p:cNvPr id="5" name="TextBox 4"/>
+          <p:cNvSpPr txBox="1"/>
           <p:nvPr/>
-        </p:nvPicPr>
-        <p:blipFill>
-          <a:blip r:embed="rId2"/>
-          <a:stretch>
-            <a:fillRect/>
-          </a:stretch>
-        </p:blipFill>
+        </p:nvSpPr>
         <p:spPr>
           <a:xfrm>
             <a:off x="841248" y="1755648"/>
-            <a:ext cx="10509199" cy="1907225"/>
+            <a:ext cx="10509199" cy="3426460"/>
           </a:xfrm>
           <a:prstGeom prst="rect">
             <a:avLst/>
           </a:prstGeom>
+          <a:noFill/>
         </p:spPr>
-      </p:pic>
+        <p:txBody>
+          <a:bodyPr wrap="square" lIns="0" rIns="0" tIns="0" bIns="0" anchor="t">
+            <a:spAutoFit/>
+          </a:bodyPr>
+          <a:lstStyle/>
+          <a:p>
+            <a:pPr marL="0" indent="0">
+              <a:lnSpc>
+                <a:spcPct val="155000"/>
+              </a:lnSpc>
+              <a:spcAft>
+                <a:spcPts val="880"/>
+              </a:spcAft>
+            </a:pPr>
+            <a:r>
+              <a:rPr sz="2000" b="0" i="0">
+                <a:solidFill>
+                  <a:srgbClr val="D63A2F"/>
+                </a:solidFill>
+                <a:latin typeface="Lato"/>
+                <a:ea typeface="Noto Sans JP"/>
+                <a:cs typeface="Noto Sans JP"/>
+              </a:rPr>
+              <a:t>・</a:t>
+            </a:r>
+            <a:r>
+              <a:rPr sz="2000" b="0" i="0">
+                <a:solidFill>
+                  <a:srgbClr val="1A1A1A"/>
+                </a:solidFill>
+                <a:latin typeface="Lato"/>
+                <a:ea typeface="Noto Sans JP"/>
+                <a:cs typeface="Noto Sans JP"/>
+              </a:rPr>
+              <a:t>1 収集: 4 種のコレクターが Kafka のトピック 5 つへ書く</a:t>
+            </a:r>
+          </a:p>
+          <a:p>
+            <a:pPr marL="0" indent="0">
+              <a:lnSpc>
+                <a:spcPct val="155000"/>
+              </a:lnSpc>
+              <a:spcAft>
+                <a:spcPts val="880"/>
+              </a:spcAft>
+            </a:pPr>
+            <a:r>
+              <a:rPr sz="2000" b="0" i="0">
+                <a:solidFill>
+                  <a:srgbClr val="D63A2F"/>
+                </a:solidFill>
+                <a:latin typeface="Lato"/>
+                <a:ea typeface="Noto Sans JP"/>
+                <a:cs typeface="Noto Sans JP"/>
+              </a:rPr>
+              <a:t>・</a:t>
+            </a:r>
+            <a:r>
+              <a:rPr sz="2000" b="0" i="0">
+                <a:solidFill>
+                  <a:srgbClr val="1A1A1A"/>
+                </a:solidFill>
+                <a:latin typeface="Lato"/>
+                <a:ea typeface="Noto Sans JP"/>
+                <a:cs typeface="Noto Sans JP"/>
+              </a:rPr>
+              <a:t>2 格納: ECS の Spark 3 つが格納先 4 つへ書き分ける</a:t>
+            </a:r>
+          </a:p>
+          <a:p>
+            <a:pPr marL="0" indent="0">
+              <a:lnSpc>
+                <a:spcPct val="155000"/>
+              </a:lnSpc>
+              <a:spcAft>
+                <a:spcPts val="880"/>
+              </a:spcAft>
+            </a:pPr>
+            <a:r>
+              <a:rPr sz="2000" b="0" i="0">
+                <a:solidFill>
+                  <a:srgbClr val="D63A2F"/>
+                </a:solidFill>
+                <a:latin typeface="Lato"/>
+                <a:ea typeface="Noto Sans JP"/>
+                <a:cs typeface="Noto Sans JP"/>
+              </a:rPr>
+              <a:t>・</a:t>
+            </a:r>
+            <a:r>
+              <a:rPr sz="2000" b="0" i="0">
+                <a:solidFill>
+                  <a:srgbClr val="1A1A1A"/>
+                </a:solidFill>
+                <a:latin typeface="Lato"/>
+                <a:ea typeface="Noto Sans JP"/>
+                <a:cs typeface="Noto Sans JP"/>
+              </a:rPr>
+              <a:t>3 可視化: Grafana がログとメトリクス、Splunk が全部を見せる</a:t>
+            </a:r>
+          </a:p>
+          <a:p>
+            <a:pPr marL="0" indent="0">
+              <a:lnSpc>
+                <a:spcPct val="155000"/>
+              </a:lnSpc>
+              <a:spcAft>
+                <a:spcPts val="880"/>
+              </a:spcAft>
+            </a:pPr>
+            <a:r>
+              <a:rPr sz="2000" b="0" i="0">
+                <a:solidFill>
+                  <a:srgbClr val="D63A2F"/>
+                </a:solidFill>
+                <a:latin typeface="Lato"/>
+                <a:ea typeface="Noto Sans JP"/>
+                <a:cs typeface="Noto Sans JP"/>
+              </a:rPr>
+              <a:t>・</a:t>
+            </a:r>
+            <a:r>
+              <a:rPr sz="2000" b="0" i="0">
+                <a:solidFill>
+                  <a:srgbClr val="1A1A1A"/>
+                </a:solidFill>
+                <a:latin typeface="Lato"/>
+                <a:ea typeface="Noto Sans JP"/>
+                <a:cs typeface="Noto Sans JP"/>
+              </a:rPr>
+              <a:t>4 アラート: 同じ 4 種を SNS へ出し、Neo4j の status を変える</a:t>
+            </a:r>
+          </a:p>
+          <a:p>
+            <a:pPr marL="0" indent="0">
+              <a:lnSpc>
+                <a:spcPct val="155000"/>
+              </a:lnSpc>
+              <a:spcAft>
+                <a:spcPts val="880"/>
+              </a:spcAft>
+            </a:pPr>
+            <a:r>
+              <a:rPr sz="2000" b="0" i="0">
+                <a:solidFill>
+                  <a:srgbClr val="D63A2F"/>
+                </a:solidFill>
+                <a:latin typeface="Lato"/>
+                <a:ea typeface="Noto Sans JP"/>
+                <a:cs typeface="Noto Sans JP"/>
+              </a:rPr>
+              <a:t>・</a:t>
+            </a:r>
+            <a:r>
+              <a:rPr sz="2000" b="0" i="0">
+                <a:solidFill>
+                  <a:srgbClr val="1A1A1A"/>
+                </a:solidFill>
+                <a:latin typeface="Lato"/>
+                <a:ea typeface="Noto Sans JP"/>
+                <a:cs typeface="Noto Sans JP"/>
+              </a:rPr>
+              <a:t>5 ワークフロー: link_down だけが人の承認を経て lab を直す</a:t>
+            </a:r>
+          </a:p>
+          <a:p>
+            <a:pPr marL="0" indent="0">
+              <a:lnSpc>
+                <a:spcPct val="155000"/>
+              </a:lnSpc>
+              <a:spcAft>
+                <a:spcPts val="880"/>
+              </a:spcAft>
+            </a:pPr>
+            <a:r>
+              <a:rPr sz="2000" b="0" i="0">
+                <a:solidFill>
+                  <a:srgbClr val="D63A2F"/>
+                </a:solidFill>
+                <a:latin typeface="Lato"/>
+                <a:ea typeface="Noto Sans JP"/>
+                <a:cs typeface="Noto Sans JP"/>
+              </a:rPr>
+              <a:t>・</a:t>
+            </a:r>
+            <a:r>
+              <a:rPr sz="2000" b="0" i="0">
+                <a:solidFill>
+                  <a:srgbClr val="1A1A1A"/>
+                </a:solidFill>
+                <a:latin typeface="Lato"/>
+                <a:ea typeface="Noto Sans JP"/>
+                <a:cs typeface="Noto Sans JP"/>
+              </a:rPr>
+              <a:t>6 エージェント: MCP ツールで調べ、Neo4j と GDS で答える</a:t>
+            </a:r>
+          </a:p>
+        </p:txBody>
+      </p:sp>
       <p:sp>
         <p:nvSpPr>
           <p:cNvPr id="6" name="TextBox 5"/>
@@ -7831,1209 +8772,6 @@
                 <a:cs typeface="Noto Sans JP"/>
               </a:rPr>
               <a:t>OSS への通信は SG だけで絞り、Kafka は認証の無い 9092 で受ける</a:t>
-            </a:r>
-          </a:p>
-        </p:txBody>
-      </p:sp>
-      <p:cxnSp>
-        <p:nvCxnSpPr>
-          <p:cNvPr id="4" name="Connector 3"/>
-          <p:cNvCxnSpPr/>
-          <p:nvPr/>
-        </p:nvCxnSpPr>
-        <p:spPr>
-          <a:xfrm>
-            <a:off x="841248" y="1426464"/>
-            <a:ext cx="10509199" cy="0"/>
-          </a:xfrm>
-          <a:prstGeom prst="line">
-            <a:avLst/>
-          </a:prstGeom>
-          <a:ln w="12700">
-            <a:solidFill>
-              <a:srgbClr val="DFDFDF"/>
-            </a:solidFill>
-          </a:ln>
-        </p:spPr>
-        <p:style>
-          <a:lnRef idx="2">
-            <a:schemeClr val="accent1"/>
-          </a:lnRef>
-          <a:fillRef idx="0">
-            <a:schemeClr val="accent1"/>
-          </a:fillRef>
-          <a:effectRef idx="1">
-            <a:schemeClr val="accent1"/>
-          </a:effectRef>
-          <a:fontRef idx="minor">
-            <a:schemeClr val="tx1"/>
-          </a:fontRef>
-        </p:style>
-      </p:cxnSp>
-      <p:sp>
-        <p:nvSpPr>
-          <p:cNvPr id="5" name="TextBox 4"/>
-          <p:cNvSpPr txBox="1"/>
-          <p:nvPr/>
-        </p:nvSpPr>
-        <p:spPr>
-          <a:xfrm>
-            <a:off x="841248" y="1755648"/>
-            <a:ext cx="10509199" cy="314960"/>
-          </a:xfrm>
-          <a:prstGeom prst="rect">
-            <a:avLst/>
-          </a:prstGeom>
-          <a:noFill/>
-        </p:spPr>
-        <p:txBody>
-          <a:bodyPr wrap="square" lIns="0" rIns="0" tIns="0" bIns="0" anchor="t">
-            <a:spAutoFit/>
-          </a:bodyPr>
-          <a:lstStyle/>
-          <a:p>
-            <a:pPr>
-              <a:lnSpc>
-                <a:spcPct val="155000"/>
-              </a:lnSpc>
-            </a:pPr>
-            <a:r>
-              <a:rPr sz="1600" b="0" i="0">
-                <a:solidFill>
-                  <a:srgbClr val="1A1A1A"/>
-                </a:solidFill>
-                <a:latin typeface="Lato"/>
-                <a:ea typeface="Noto Sans JP"/>
-                <a:cs typeface="Noto Sans JP"/>
-              </a:rPr>
-              <a:t>MSK の SG とその行を外し、下の行を足した。ほかの行はマネージド版のまま。</a:t>
-            </a:r>
-          </a:p>
-        </p:txBody>
-      </p:sp>
-      <p:graphicFrame>
-        <p:nvGraphicFramePr>
-          <p:cNvPr id="6" name="Table 5"/>
-          <p:cNvGraphicFramePr>
-            <a:graphicFrameLocks noGrp="1"/>
-          </p:cNvGraphicFramePr>
-          <p:nvPr/>
-        </p:nvGraphicFramePr>
-        <p:xfrm>
-          <a:off x="841248" y="2308352"/>
-          <a:ext cx="10509199" cy="3155692"/>
-        </p:xfrm>
-        <a:graphic>
-          <a:graphicData uri="http://schemas.openxmlformats.org/drawingml/2006/table">
-            <a:tbl>
-              <a:tblPr firstRow="1" bandRow="0"/>
-              <a:tblGrid>
-                <a:gridCol w="3503066"/>
-                <a:gridCol w="3503066"/>
-                <a:gridCol w="3503067"/>
-              </a:tblGrid>
-              <a:tr h="449072">
-                <a:tc>
-                  <a:txBody>
-                    <a:bodyPr wrap="square"/>
-                    <a:lstStyle/>
-                    <a:p>
-                      <a:pPr>
-                        <a:lnSpc>
-                          <a:spcPct val="135000"/>
-                        </a:lnSpc>
-                      </a:pPr>
-                      <a:r>
-                        <a:rPr sz="1312" b="1" i="0">
-                          <a:solidFill>
-                            <a:srgbClr val="111110"/>
-                          </a:solidFill>
-                          <a:latin typeface="Lato"/>
-                          <a:ea typeface="Noto Sans JP"/>
-                          <a:cs typeface="Noto Sans JP"/>
-                        </a:rPr>
-                        <a:t>送り元</a:t>
-                      </a:r>
-                    </a:p>
-                  </a:txBody>
-                  <a:tcPr marL="91440" marR="91440" marT="45720" marB="45720" anchor="ctr">
-                    <a:lnB w="15240" cap="flat">
-                      <a:solidFill>
-                        <a:srgbClr val="111110"/>
-                      </a:solidFill>
-                    </a:lnB>
-                    <a:noFill/>
-                  </a:tcPr>
-                </a:tc>
-                <a:tc>
-                  <a:txBody>
-                    <a:bodyPr wrap="square"/>
-                    <a:lstStyle/>
-                    <a:p>
-                      <a:pPr>
-                        <a:lnSpc>
-                          <a:spcPct val="135000"/>
-                        </a:lnSpc>
-                      </a:pPr>
-                      <a:r>
-                        <a:rPr sz="1312" b="1" i="0">
-                          <a:solidFill>
-                            <a:srgbClr val="111110"/>
-                          </a:solidFill>
-                          <a:latin typeface="Lato"/>
-                          <a:ea typeface="Noto Sans JP"/>
-                          <a:cs typeface="Noto Sans JP"/>
-                        </a:rPr>
-                        <a:t>宛先</a:t>
-                      </a:r>
-                    </a:p>
-                  </a:txBody>
-                  <a:tcPr marL="91440" marR="91440" marT="45720" marB="45720" anchor="ctr">
-                    <a:lnB w="15240" cap="flat">
-                      <a:solidFill>
-                        <a:srgbClr val="111110"/>
-                      </a:solidFill>
-                    </a:lnB>
-                    <a:noFill/>
-                  </a:tcPr>
-                </a:tc>
-                <a:tc>
-                  <a:txBody>
-                    <a:bodyPr wrap="square"/>
-                    <a:lstStyle/>
-                    <a:p>
-                      <a:pPr>
-                        <a:lnSpc>
-                          <a:spcPct val="135000"/>
-                        </a:lnSpc>
-                      </a:pPr>
-                      <a:r>
-                        <a:rPr sz="1312" b="1" i="0">
-                          <a:solidFill>
-                            <a:srgbClr val="111110"/>
-                          </a:solidFill>
-                          <a:latin typeface="Lato"/>
-                          <a:ea typeface="Noto Sans JP"/>
-                          <a:cs typeface="Noto Sans JP"/>
-                        </a:rPr>
-                        <a:t>ポート</a:t>
-                      </a:r>
-                    </a:p>
-                  </a:txBody>
-                  <a:tcPr marL="91440" marR="91440" marT="45720" marB="45720" anchor="ctr">
-                    <a:lnB w="15240" cap="flat">
-                      <a:solidFill>
-                        <a:srgbClr val="111110"/>
-                      </a:solidFill>
-                    </a:lnB>
-                    <a:noFill/>
-                  </a:tcPr>
-                </a:tc>
-              </a:tr>
-              <a:tr h="541324">
-                <a:tc>
-                  <a:txBody>
-                    <a:bodyPr wrap="square"/>
-                    <a:lstStyle/>
-                    <a:p>
-                      <a:pPr>
-                        <a:lnSpc>
-                          <a:spcPct val="135000"/>
-                        </a:lnSpc>
-                      </a:pPr>
-                      <a:r>
-                        <a:rPr sz="1312" b="0" i="0">
-                          <a:solidFill>
-                            <a:srgbClr val="1A1A1A"/>
-                          </a:solidFill>
-                          <a:latin typeface="Lato"/>
-                          <a:ea typeface="Noto Sans JP"/>
-                          <a:cs typeface="Noto Sans JP"/>
-                        </a:rPr>
-                        <a:t>telegraf・spark・kafka_ui</a:t>
-                      </a:r>
-                    </a:p>
-                  </a:txBody>
-                  <a:tcPr marL="91440" marR="91440" marT="45720" marB="45720" anchor="ctr">
-                    <a:lnB w="9525" cap="flat">
-                      <a:solidFill>
-                        <a:srgbClr val="DFDFDF"/>
-                      </a:solidFill>
-                    </a:lnB>
-                    <a:noFill/>
-                  </a:tcPr>
-                </a:tc>
-                <a:tc>
-                  <a:txBody>
-                    <a:bodyPr wrap="square"/>
-                    <a:lstStyle/>
-                    <a:p>
-                      <a:pPr>
-                        <a:lnSpc>
-                          <a:spcPct val="135000"/>
-                        </a:lnSpc>
-                      </a:pPr>
-                      <a:r>
-                        <a:rPr sz="1312" b="0" i="0">
-                          <a:solidFill>
-                            <a:srgbClr val="1A1A1A"/>
-                          </a:solidFill>
-                          <a:latin typeface="Lato"/>
-                          <a:ea typeface="Noto Sans JP"/>
-                          <a:cs typeface="Noto Sans JP"/>
-                        </a:rPr>
-                        <a:t>kafka</a:t>
-                      </a:r>
-                    </a:p>
-                  </a:txBody>
-                  <a:tcPr marL="91440" marR="91440" marT="45720" marB="45720" anchor="ctr">
-                    <a:lnB w="9525" cap="flat">
-                      <a:solidFill>
-                        <a:srgbClr val="DFDFDF"/>
-                      </a:solidFill>
-                    </a:lnB>
-                    <a:noFill/>
-                  </a:tcPr>
-                </a:tc>
-                <a:tc>
-                  <a:txBody>
-                    <a:bodyPr wrap="square"/>
-                    <a:lstStyle/>
-                    <a:p>
-                      <a:pPr>
-                        <a:lnSpc>
-                          <a:spcPct val="135000"/>
-                        </a:lnSpc>
-                      </a:pPr>
-                      <a:r>
-                        <a:rPr sz="1312" b="0" i="0">
-                          <a:solidFill>
-                            <a:srgbClr val="1A1A1A"/>
-                          </a:solidFill>
-                          <a:latin typeface="Lato"/>
-                          <a:ea typeface="Noto Sans JP"/>
-                          <a:cs typeface="Noto Sans JP"/>
-                        </a:rPr>
-                        <a:t>9092（認証なし）</a:t>
-                      </a:r>
-                    </a:p>
-                  </a:txBody>
-                  <a:tcPr marL="91440" marR="91440" marT="45720" marB="45720" anchor="ctr">
-                    <a:lnB w="9525" cap="flat">
-                      <a:solidFill>
-                        <a:srgbClr val="DFDFDF"/>
-                      </a:solidFill>
-                    </a:lnB>
-                    <a:noFill/>
-                  </a:tcPr>
-                </a:tc>
-              </a:tr>
-              <a:tr h="541324">
-                <a:tc>
-                  <a:txBody>
-                    <a:bodyPr wrap="square"/>
-                    <a:lstStyle/>
-                    <a:p>
-                      <a:pPr>
-                        <a:lnSpc>
-                          <a:spcPct val="135000"/>
-                        </a:lnSpc>
-                      </a:pPr>
-                      <a:r>
-                        <a:rPr sz="1312" b="0" i="0">
-                          <a:solidFill>
-                            <a:srgbClr val="1A1A1A"/>
-                          </a:solidFill>
-                          <a:latin typeface="Lato"/>
-                          <a:ea typeface="Noto Sans JP"/>
-                          <a:cs typeface="Noto Sans JP"/>
-                        </a:rPr>
-                        <a:t>kafka・victoriametrics</a:t>
-                      </a:r>
-                    </a:p>
-                  </a:txBody>
-                  <a:tcPr marL="91440" marR="91440" marT="45720" marB="45720" anchor="ctr">
-                    <a:lnB w="9525" cap="flat">
-                      <a:solidFill>
-                        <a:srgbClr val="DFDFDF"/>
-                      </a:solidFill>
-                    </a:lnB>
-                    <a:noFill/>
-                  </a:tcPr>
-                </a:tc>
-                <a:tc>
-                  <a:txBody>
-                    <a:bodyPr wrap="square"/>
-                    <a:lstStyle/>
-                    <a:p>
-                      <a:pPr>
-                        <a:lnSpc>
-                          <a:spcPct val="135000"/>
-                        </a:lnSpc>
-                      </a:pPr>
-                      <a:r>
-                        <a:rPr sz="1312" b="0" i="0">
-                          <a:solidFill>
-                            <a:srgbClr val="1A1A1A"/>
-                          </a:solidFill>
-                          <a:latin typeface="Lato"/>
-                          <a:ea typeface="Noto Sans JP"/>
-                          <a:cs typeface="Noto Sans JP"/>
-                        </a:rPr>
-                        <a:t>efs</a:t>
-                      </a:r>
-                    </a:p>
-                  </a:txBody>
-                  <a:tcPr marL="91440" marR="91440" marT="45720" marB="45720" anchor="ctr">
-                    <a:lnB w="9525" cap="flat">
-                      <a:solidFill>
-                        <a:srgbClr val="DFDFDF"/>
-                      </a:solidFill>
-                    </a:lnB>
-                    <a:noFill/>
-                  </a:tcPr>
-                </a:tc>
-                <a:tc>
-                  <a:txBody>
-                    <a:bodyPr wrap="square"/>
-                    <a:lstStyle/>
-                    <a:p>
-                      <a:pPr>
-                        <a:lnSpc>
-                          <a:spcPct val="135000"/>
-                        </a:lnSpc>
-                      </a:pPr>
-                      <a:r>
-                        <a:rPr sz="1312" b="0" i="0">
-                          <a:solidFill>
-                            <a:srgbClr val="1A1A1A"/>
-                          </a:solidFill>
-                          <a:latin typeface="Lato"/>
-                          <a:ea typeface="Noto Sans JP"/>
-                          <a:cs typeface="Noto Sans JP"/>
-                        </a:rPr>
-                        <a:t>2049（NFS・TLS）</a:t>
-                      </a:r>
-                    </a:p>
-                  </a:txBody>
-                  <a:tcPr marL="91440" marR="91440" marT="45720" marB="45720" anchor="ctr">
-                    <a:lnB w="9525" cap="flat">
-                      <a:solidFill>
-                        <a:srgbClr val="DFDFDF"/>
-                      </a:solidFill>
-                    </a:lnB>
-                    <a:noFill/>
-                  </a:tcPr>
-                </a:tc>
-              </a:tr>
-              <a:tr h="541324">
-                <a:tc>
-                  <a:txBody>
-                    <a:bodyPr wrap="square"/>
-                    <a:lstStyle/>
-                    <a:p>
-                      <a:pPr>
-                        <a:lnSpc>
-                          <a:spcPct val="135000"/>
-                        </a:lnSpc>
-                      </a:pPr>
-                      <a:r>
-                        <a:rPr sz="1312" b="0" i="0">
-                          <a:solidFill>
-                            <a:srgbClr val="1A1A1A"/>
-                          </a:solidFill>
-                          <a:latin typeface="Lato"/>
-                          <a:ea typeface="Noto Sans JP"/>
-                          <a:cs typeface="Noto Sans JP"/>
-                        </a:rPr>
-                        <a:t>spark・grafana・runtime・lambda</a:t>
-                      </a:r>
-                    </a:p>
-                  </a:txBody>
-                  <a:tcPr marL="91440" marR="91440" marT="45720" marB="45720" anchor="ctr">
-                    <a:lnB w="9525" cap="flat">
-                      <a:solidFill>
-                        <a:srgbClr val="DFDFDF"/>
-                      </a:solidFill>
-                    </a:lnB>
-                    <a:noFill/>
-                  </a:tcPr>
-                </a:tc>
-                <a:tc>
-                  <a:txBody>
-                    <a:bodyPr wrap="square"/>
-                    <a:lstStyle/>
-                    <a:p>
-                      <a:pPr>
-                        <a:lnSpc>
-                          <a:spcPct val="135000"/>
-                        </a:lnSpc>
-                      </a:pPr>
-                      <a:r>
-                        <a:rPr sz="1312" b="0" i="0">
-                          <a:solidFill>
-                            <a:srgbClr val="1A1A1A"/>
-                          </a:solidFill>
-                          <a:latin typeface="Lato"/>
-                          <a:ea typeface="Noto Sans JP"/>
-                          <a:cs typeface="Noto Sans JP"/>
-                        </a:rPr>
-                        <a:t>opensearch</a:t>
-                      </a:r>
-                    </a:p>
-                  </a:txBody>
-                  <a:tcPr marL="91440" marR="91440" marT="45720" marB="45720" anchor="ctr">
-                    <a:lnB w="9525" cap="flat">
-                      <a:solidFill>
-                        <a:srgbClr val="DFDFDF"/>
-                      </a:solidFill>
-                    </a:lnB>
-                    <a:noFill/>
-                  </a:tcPr>
-                </a:tc>
-                <a:tc>
-                  <a:txBody>
-                    <a:bodyPr wrap="square"/>
-                    <a:lstStyle/>
-                    <a:p>
-                      <a:pPr>
-                        <a:lnSpc>
-                          <a:spcPct val="135000"/>
-                        </a:lnSpc>
-                      </a:pPr>
-                      <a:r>
-                        <a:rPr sz="1312" b="0" i="0">
-                          <a:solidFill>
-                            <a:srgbClr val="1A1A1A"/>
-                          </a:solidFill>
-                          <a:latin typeface="Lato"/>
-                          <a:ea typeface="Noto Sans JP"/>
-                          <a:cs typeface="Noto Sans JP"/>
-                        </a:rPr>
-                        <a:t>9200（REST）</a:t>
-                      </a:r>
-                    </a:p>
-                  </a:txBody>
-                  <a:tcPr marL="91440" marR="91440" marT="45720" marB="45720" anchor="ctr">
-                    <a:lnB w="9525" cap="flat">
-                      <a:solidFill>
-                        <a:srgbClr val="DFDFDF"/>
-                      </a:solidFill>
-                    </a:lnB>
-                    <a:noFill/>
-                  </a:tcPr>
-                </a:tc>
-              </a:tr>
-              <a:tr h="541324">
-                <a:tc>
-                  <a:txBody>
-                    <a:bodyPr wrap="square"/>
-                    <a:lstStyle/>
-                    <a:p>
-                      <a:pPr>
-                        <a:lnSpc>
-                          <a:spcPct val="135000"/>
-                        </a:lnSpc>
-                      </a:pPr>
-                      <a:r>
-                        <a:rPr sz="1312" b="0" i="0">
-                          <a:solidFill>
-                            <a:srgbClr val="1A1A1A"/>
-                          </a:solidFill>
-                          <a:latin typeface="Lato"/>
-                          <a:ea typeface="Noto Sans JP"/>
-                          <a:cs typeface="Noto Sans JP"/>
-                        </a:rPr>
-                        <a:t>spark（書く）・grafana・runtime・lambda（読む）</a:t>
-                      </a:r>
-                    </a:p>
-                  </a:txBody>
-                  <a:tcPr marL="91440" marR="91440" marT="45720" marB="45720" anchor="ctr">
-                    <a:lnB w="9525" cap="flat">
-                      <a:solidFill>
-                        <a:srgbClr val="DFDFDF"/>
-                      </a:solidFill>
-                    </a:lnB>
-                    <a:noFill/>
-                  </a:tcPr>
-                </a:tc>
-                <a:tc>
-                  <a:txBody>
-                    <a:bodyPr wrap="square"/>
-                    <a:lstStyle/>
-                    <a:p>
-                      <a:pPr>
-                        <a:lnSpc>
-                          <a:spcPct val="135000"/>
-                        </a:lnSpc>
-                      </a:pPr>
-                      <a:r>
-                        <a:rPr sz="1312" b="0" i="0">
-                          <a:solidFill>
-                            <a:srgbClr val="1A1A1A"/>
-                          </a:solidFill>
-                          <a:latin typeface="Lato"/>
-                          <a:ea typeface="Noto Sans JP"/>
-                          <a:cs typeface="Noto Sans JP"/>
-                        </a:rPr>
-                        <a:t>victoriametrics</a:t>
-                      </a:r>
-                    </a:p>
-                  </a:txBody>
-                  <a:tcPr marL="91440" marR="91440" marT="45720" marB="45720" anchor="ctr">
-                    <a:lnB w="9525" cap="flat">
-                      <a:solidFill>
-                        <a:srgbClr val="DFDFDF"/>
-                      </a:solidFill>
-                    </a:lnB>
-                    <a:noFill/>
-                  </a:tcPr>
-                </a:tc>
-                <a:tc>
-                  <a:txBody>
-                    <a:bodyPr wrap="square"/>
-                    <a:lstStyle/>
-                    <a:p>
-                      <a:pPr>
-                        <a:lnSpc>
-                          <a:spcPct val="135000"/>
-                        </a:lnSpc>
-                      </a:pPr>
-                      <a:r>
-                        <a:rPr sz="1312" b="0" i="0">
-                          <a:solidFill>
-                            <a:srgbClr val="1A1A1A"/>
-                          </a:solidFill>
-                          <a:latin typeface="Lato"/>
-                          <a:ea typeface="Noto Sans JP"/>
-                          <a:cs typeface="Noto Sans JP"/>
-                        </a:rPr>
-                        <a:t>8480・8481</a:t>
-                      </a:r>
-                    </a:p>
-                  </a:txBody>
-                  <a:tcPr marL="91440" marR="91440" marT="45720" marB="45720" anchor="ctr">
-                    <a:lnB w="9525" cap="flat">
-                      <a:solidFill>
-                        <a:srgbClr val="DFDFDF"/>
-                      </a:solidFill>
-                    </a:lnB>
-                    <a:noFill/>
-                  </a:tcPr>
-                </a:tc>
-              </a:tr>
-              <a:tr h="541324">
-                <a:tc>
-                  <a:txBody>
-                    <a:bodyPr wrap="square"/>
-                    <a:lstStyle/>
-                    <a:p>
-                      <a:pPr>
-                        <a:lnSpc>
-                          <a:spcPct val="135000"/>
-                        </a:lnSpc>
-                      </a:pPr>
-                      <a:r>
-                        <a:rPr sz="1312" b="0" i="0">
-                          <a:solidFill>
-                            <a:srgbClr val="1A1A1A"/>
-                          </a:solidFill>
-                          <a:latin typeface="Lato"/>
-                          <a:ea typeface="Noto Sans JP"/>
-                          <a:cs typeface="Noto Sans JP"/>
-                        </a:rPr>
-                        <a:t>web・runtime・lambda・workflow・nautobot</a:t>
-                      </a:r>
-                    </a:p>
-                  </a:txBody>
-                  <a:tcPr marL="91440" marR="91440" marT="45720" marB="45720" anchor="ctr">
-                    <a:lnB w="9525" cap="flat">
-                      <a:solidFill>
-                        <a:srgbClr val="DFDFDF"/>
-                      </a:solidFill>
-                    </a:lnB>
-                    <a:noFill/>
-                  </a:tcPr>
-                </a:tc>
-                <a:tc>
-                  <a:txBody>
-                    <a:bodyPr wrap="square"/>
-                    <a:lstStyle/>
-                    <a:p>
-                      <a:pPr>
-                        <a:lnSpc>
-                          <a:spcPct val="135000"/>
-                        </a:lnSpc>
-                      </a:pPr>
-                      <a:r>
-                        <a:rPr sz="1312" b="0" i="0">
-                          <a:solidFill>
-                            <a:srgbClr val="1A1A1A"/>
-                          </a:solidFill>
-                          <a:latin typeface="Lato"/>
-                          <a:ea typeface="Noto Sans JP"/>
-                          <a:cs typeface="Noto Sans JP"/>
-                        </a:rPr>
-                        <a:t>neo4j</a:t>
-                      </a:r>
-                    </a:p>
-                  </a:txBody>
-                  <a:tcPr marL="91440" marR="91440" marT="45720" marB="45720" anchor="ctr">
-                    <a:lnB w="9525" cap="flat">
-                      <a:solidFill>
-                        <a:srgbClr val="DFDFDF"/>
-                      </a:solidFill>
-                    </a:lnB>
-                    <a:noFill/>
-                  </a:tcPr>
-                </a:tc>
-                <a:tc>
-                  <a:txBody>
-                    <a:bodyPr wrap="square"/>
-                    <a:lstStyle/>
-                    <a:p>
-                      <a:pPr>
-                        <a:lnSpc>
-                          <a:spcPct val="135000"/>
-                        </a:lnSpc>
-                      </a:pPr>
-                      <a:r>
-                        <a:rPr sz="1312" b="0" i="0">
-                          <a:solidFill>
-                            <a:srgbClr val="1A1A1A"/>
-                          </a:solidFill>
-                          <a:latin typeface="Lato"/>
-                          <a:ea typeface="Noto Sans JP"/>
-                          <a:cs typeface="Noto Sans JP"/>
-                        </a:rPr>
-                        <a:t>7687（Bolt）</a:t>
-                      </a:r>
-                    </a:p>
-                  </a:txBody>
-                  <a:tcPr marL="91440" marR="91440" marT="45720" marB="45720" anchor="ctr">
-                    <a:lnB w="9525" cap="flat">
-                      <a:solidFill>
-                        <a:srgbClr val="DFDFDF"/>
-                      </a:solidFill>
-                    </a:lnB>
-                    <a:noFill/>
-                  </a:tcPr>
-                </a:tc>
-              </a:tr>
-            </a:tbl>
-          </a:graphicData>
-        </a:graphic>
-      </p:graphicFrame>
-      <p:sp>
-        <p:nvSpPr>
-          <p:cNvPr id="7" name="TextBox 6"/>
-          <p:cNvSpPr txBox="1"/>
-          <p:nvPr/>
-        </p:nvSpPr>
-        <p:spPr>
-          <a:xfrm>
-            <a:off x="841248" y="6272784"/>
-            <a:ext cx="10509199" cy="274320"/>
-          </a:xfrm>
-          <a:prstGeom prst="rect">
-            <a:avLst/>
-          </a:prstGeom>
-          <a:noFill/>
-        </p:spPr>
-        <p:txBody>
-          <a:bodyPr wrap="square" lIns="0" rIns="0" tIns="0" bIns="0" anchor="t">
-            <a:spAutoFit/>
-          </a:bodyPr>
-          <a:lstStyle/>
-          <a:p>
-            <a:pPr algn="r"/>
-            <a:r>
-              <a:rPr sz="1000" b="0" i="0">
-                <a:solidFill>
-                  <a:srgbClr val="A5A5A5"/>
-                </a:solidFill>
-                <a:latin typeface="Menlo"/>
-                <a:ea typeface="Menlo"/>
-                <a:cs typeface="Menlo"/>
-              </a:rPr>
-              <a:t>7 / 10</a:t>
-            </a:r>
-          </a:p>
-        </p:txBody>
-      </p:sp>
-    </p:spTree>
-  </p:cSld>
-  <p:clrMapOvr>
-    <a:masterClrMapping/>
-  </p:clrMapOvr>
-</p:sld>
-</file>
-
-<file path=ppt/slides/slide8.xml><?xml version="1.0" encoding="utf-8"?>
-<p:sld xmlns:a="http://schemas.openxmlformats.org/drawingml/2006/main" xmlns:p="http://schemas.openxmlformats.org/presentationml/2006/main" xmlns:r="http://schemas.openxmlformats.org/officeDocument/2006/relationships">
-  <p:cSld>
-    <p:bg>
-      <p:bgPr>
-        <a:solidFill>
-          <a:srgbClr val="FAF9F6"/>
-        </a:solidFill>
-        <a:effectLst/>
-      </p:bgPr>
-    </p:bg>
-    <p:spTree>
-      <p:nvGrpSpPr>
-        <p:cNvPr id="1" name=""/>
-        <p:cNvGrpSpPr/>
-        <p:nvPr/>
-      </p:nvGrpSpPr>
-      <p:grpSpPr/>
-      <p:sp>
-        <p:nvSpPr>
-          <p:cNvPr id="2" name="Rectangle 1"/>
-          <p:cNvSpPr/>
-          <p:nvPr/>
-        </p:nvSpPr>
-        <p:spPr>
-          <a:xfrm>
-            <a:off x="841248" y="640080"/>
-            <a:ext cx="82296" cy="402336"/>
-          </a:xfrm>
-          <a:prstGeom prst="rect">
-            <a:avLst/>
-          </a:prstGeom>
-          <a:solidFill>
-            <a:srgbClr val="111110"/>
-          </a:solidFill>
-          <a:ln>
-            <a:noFill/>
-          </a:ln>
-          <a:effectLst/>
-        </p:spPr>
-        <p:style>
-          <a:lnRef idx="1">
-            <a:schemeClr val="accent1"/>
-          </a:lnRef>
-          <a:fillRef idx="3">
-            <a:schemeClr val="accent1"/>
-          </a:fillRef>
-          <a:effectRef idx="2">
-            <a:schemeClr val="accent1"/>
-          </a:effectRef>
-          <a:fontRef idx="minor">
-            <a:schemeClr val="lt1"/>
-          </a:fontRef>
-        </p:style>
-        <p:txBody>
-          <a:bodyPr rtlCol="0" anchor="ctr"/>
-          <a:lstStyle/>
-          <a:p>
-            <a:pPr algn="ctr"/>
-          </a:p>
-        </p:txBody>
-      </p:sp>
-      <p:sp>
-        <p:nvSpPr>
-          <p:cNvPr id="3" name="TextBox 2"/>
-          <p:cNvSpPr txBox="1"/>
-          <p:nvPr/>
-        </p:nvSpPr>
-        <p:spPr>
-          <a:xfrm>
-            <a:off x="1097280" y="548640"/>
-            <a:ext cx="10253167" cy="786384"/>
-          </a:xfrm>
-          <a:prstGeom prst="rect">
-            <a:avLst/>
-          </a:prstGeom>
-          <a:noFill/>
-        </p:spPr>
-        <p:txBody>
-          <a:bodyPr wrap="square" lIns="0" rIns="0" tIns="0" bIns="0" anchor="t">
-            <a:spAutoFit/>
-          </a:bodyPr>
-          <a:lstStyle/>
-          <a:p>
-            <a:pPr>
-              <a:lnSpc>
-                <a:spcPct val="120000"/>
-              </a:lnSpc>
-            </a:pPr>
-            <a:r>
-              <a:rPr sz="2400" b="1" i="0">
-                <a:solidFill>
-                  <a:srgbClr val="111110"/>
-                </a:solidFill>
-                <a:latin typeface="Lato"/>
-                <a:ea typeface="Noto Sans JP"/>
-                <a:cs typeface="Noto Sans JP"/>
-              </a:rPr>
-              <a:t>oss/ops/up.sh は同じ 9 ルートを作り、down.sh が逆の順に消す</a:t>
-            </a:r>
-          </a:p>
-        </p:txBody>
-      </p:sp>
-      <p:cxnSp>
-        <p:nvCxnSpPr>
-          <p:cNvPr id="4" name="Connector 3"/>
-          <p:cNvCxnSpPr/>
-          <p:nvPr/>
-        </p:nvCxnSpPr>
-        <p:spPr>
-          <a:xfrm>
-            <a:off x="841248" y="1426464"/>
-            <a:ext cx="10509199" cy="0"/>
-          </a:xfrm>
-          <a:prstGeom prst="line">
-            <a:avLst/>
-          </a:prstGeom>
-          <a:ln w="12700">
-            <a:solidFill>
-              <a:srgbClr val="DFDFDF"/>
-            </a:solidFill>
-          </a:ln>
-        </p:spPr>
-        <p:style>
-          <a:lnRef idx="2">
-            <a:schemeClr val="accent1"/>
-          </a:lnRef>
-          <a:fillRef idx="0">
-            <a:schemeClr val="accent1"/>
-          </a:fillRef>
-          <a:effectRef idx="1">
-            <a:schemeClr val="accent1"/>
-          </a:effectRef>
-          <a:fontRef idx="minor">
-            <a:schemeClr val="tx1"/>
-          </a:fontRef>
-        </p:style>
-      </p:cxnSp>
-      <p:sp>
-        <p:nvSpPr>
-          <p:cNvPr id="5" name="TextBox 4"/>
-          <p:cNvSpPr txBox="1"/>
-          <p:nvPr/>
-        </p:nvSpPr>
-        <p:spPr>
-          <a:xfrm>
-            <a:off x="841248" y="1755648"/>
-            <a:ext cx="10509199" cy="3337560"/>
-          </a:xfrm>
-          <a:prstGeom prst="rect">
-            <a:avLst/>
-          </a:prstGeom>
-          <a:noFill/>
-        </p:spPr>
-        <p:txBody>
-          <a:bodyPr wrap="square" lIns="0" rIns="0" tIns="0" bIns="0" anchor="t">
-            <a:spAutoFit/>
-          </a:bodyPr>
-          <a:lstStyle/>
-          <a:p>
-            <a:pPr marL="0" indent="0">
-              <a:lnSpc>
-                <a:spcPct val="155000"/>
-              </a:lnSpc>
-              <a:spcAft>
-                <a:spcPts val="792"/>
-              </a:spcAft>
-            </a:pPr>
-            <a:r>
-              <a:rPr sz="1800" b="0" i="0">
-                <a:solidFill>
-                  <a:srgbClr val="D63A2F"/>
-                </a:solidFill>
-                <a:latin typeface="Lato"/>
-                <a:ea typeface="Noto Sans JP"/>
-                <a:cs typeface="Noto Sans JP"/>
-              </a:rPr>
-              <a:t>・</a:t>
-            </a:r>
-            <a:r>
-              <a:rPr sz="1800" b="0" i="0">
-                <a:solidFill>
-                  <a:srgbClr val="1A1A1A"/>
-                </a:solidFill>
-                <a:latin typeface="Lato"/>
-                <a:ea typeface="Noto Sans JP"/>
-                <a:cs typeface="Noto Sans JP"/>
-              </a:rPr>
-              <a:t>作る順: base/ecr → base/core → agent → lab → stream → graph → nautobot → analytics → workflow</a:t>
-            </a:r>
-          </a:p>
-          <a:p>
-            <a:pPr marL="0" indent="0">
-              <a:lnSpc>
-                <a:spcPct val="155000"/>
-              </a:lnSpc>
-              <a:spcAft>
-                <a:spcPts val="792"/>
-              </a:spcAft>
-            </a:pPr>
-            <a:r>
-              <a:rPr sz="1800" b="0" i="0">
-                <a:solidFill>
-                  <a:srgbClr val="D63A2F"/>
-                </a:solidFill>
-                <a:latin typeface="Lato"/>
-                <a:ea typeface="Noto Sans JP"/>
-                <a:cs typeface="Noto Sans JP"/>
-              </a:rPr>
-              <a:t>・</a:t>
-            </a:r>
-            <a:r>
-              <a:rPr sz="1800" b="0" i="0">
-                <a:solidFill>
-                  <a:srgbClr val="1A1A1A"/>
-                </a:solidFill>
-                <a:latin typeface="Lato"/>
-                <a:ea typeface="Noto Sans JP"/>
-                <a:cs typeface="Noto Sans JP"/>
-              </a:rPr>
-              <a:t>格納先は 4 つ全部と Grafana をいつも作る。KB は作らない</a:t>
-            </a:r>
-          </a:p>
-          <a:p>
-            <a:pPr marL="0" indent="0">
-              <a:lnSpc>
-                <a:spcPct val="155000"/>
-              </a:lnSpc>
-              <a:spcAft>
-                <a:spcPts val="792"/>
-              </a:spcAft>
-            </a:pPr>
-            <a:r>
-              <a:rPr sz="1800" b="0" i="0">
-                <a:solidFill>
-                  <a:srgbClr val="D63A2F"/>
-                </a:solidFill>
-                <a:latin typeface="Lato"/>
-                <a:ea typeface="Noto Sans JP"/>
-                <a:cs typeface="Noto Sans JP"/>
-              </a:rPr>
-              <a:t>・</a:t>
-            </a:r>
-            <a:r>
-              <a:rPr sz="1800" b="0" i="0">
-                <a:solidFill>
-                  <a:srgbClr val="1A1A1A"/>
-                </a:solidFill>
-                <a:latin typeface="Lato"/>
-                <a:ea typeface="Noto Sans JP"/>
-                <a:cs typeface="Noto Sans JP"/>
-              </a:rPr>
-              <a:t>消すのは接頭辞 &lt;owner&gt;-nwc-oss のものだけ。KEEP_ECR=1 で ECR を残す</a:t>
-            </a:r>
-          </a:p>
-          <a:p>
-            <a:pPr marL="0" indent="0">
-              <a:lnSpc>
-                <a:spcPct val="155000"/>
-              </a:lnSpc>
-              <a:spcAft>
-                <a:spcPts val="792"/>
-              </a:spcAft>
-            </a:pPr>
-            <a:r>
-              <a:rPr sz="1800" b="0" i="0">
-                <a:solidFill>
-                  <a:srgbClr val="D63A2F"/>
-                </a:solidFill>
-                <a:latin typeface="Lato"/>
-                <a:ea typeface="Noto Sans JP"/>
-                <a:cs typeface="Noto Sans JP"/>
-              </a:rPr>
-              <a:t>・</a:t>
-            </a:r>
-            <a:r>
-              <a:rPr sz="1800" b="0" i="0">
-                <a:solidFill>
-                  <a:srgbClr val="1A1A1A"/>
-                </a:solidFill>
-                <a:latin typeface="Lato"/>
-                <a:ea typeface="Noto Sans JP"/>
-                <a:cs typeface="Noto Sans JP"/>
-              </a:rPr>
-              <a:t>Fargate の vCPU を OSS 版だけで 21.5 使う（このアカウントの上限は 30）</a:t>
-            </a:r>
-          </a:p>
-          <a:p>
-            <a:pPr marL="0" indent="0">
-              <a:lnSpc>
-                <a:spcPct val="155000"/>
-              </a:lnSpc>
-              <a:spcAft>
-                <a:spcPts val="792"/>
-              </a:spcAft>
-            </a:pPr>
-            <a:r>
-              <a:rPr sz="1800" b="0" i="0">
-                <a:solidFill>
-                  <a:srgbClr val="D63A2F"/>
-                </a:solidFill>
-                <a:latin typeface="Lato"/>
-                <a:ea typeface="Noto Sans JP"/>
-                <a:cs typeface="Noto Sans JP"/>
-              </a:rPr>
-              <a:t>・</a:t>
-            </a:r>
-            <a:r>
-              <a:rPr sz="1800" b="0" i="0">
-                <a:solidFill>
-                  <a:srgbClr val="1A1A1A"/>
-                </a:solidFill>
-                <a:latin typeface="Lato"/>
-                <a:ea typeface="Noto Sans JP"/>
-                <a:cs typeface="Noto Sans JP"/>
-              </a:rPr>
-              <a:t>EFS は $0.36 / GB 月。時間課金の合計と所要時間は docs にまだ無い</a:t>
-            </a:r>
-          </a:p>
-        </p:txBody>
-      </p:sp>
-      <p:sp>
-        <p:nvSpPr>
-          <p:cNvPr id="6" name="TextBox 5"/>
-          <p:cNvSpPr txBox="1"/>
-          <p:nvPr/>
-        </p:nvSpPr>
-        <p:spPr>
-          <a:xfrm>
-            <a:off x="841248" y="6272784"/>
-            <a:ext cx="10509199" cy="274320"/>
-          </a:xfrm>
-          <a:prstGeom prst="rect">
-            <a:avLst/>
-          </a:prstGeom>
-          <a:noFill/>
-        </p:spPr>
-        <p:txBody>
-          <a:bodyPr wrap="square" lIns="0" rIns="0" tIns="0" bIns="0" anchor="t">
-            <a:spAutoFit/>
-          </a:bodyPr>
-          <a:lstStyle/>
-          <a:p>
-            <a:pPr algn="r"/>
-            <a:r>
-              <a:rPr sz="1000" b="0" i="0">
-                <a:solidFill>
-                  <a:srgbClr val="A5A5A5"/>
-                </a:solidFill>
-                <a:latin typeface="Menlo"/>
-                <a:ea typeface="Menlo"/>
-                <a:cs typeface="Menlo"/>
-              </a:rPr>
-              <a:t>8 / 10</a:t>
-            </a:r>
-          </a:p>
-        </p:txBody>
-      </p:sp>
-    </p:spTree>
-  </p:cSld>
-  <p:clrMapOvr>
-    <a:masterClrMapping/>
-  </p:clrMapOvr>
-</p:sld>
-</file>
-
-<file path=ppt/slides/slide9.xml><?xml version="1.0" encoding="utf-8"?>
-<p:sld xmlns:a="http://schemas.openxmlformats.org/drawingml/2006/main" xmlns:p="http://schemas.openxmlformats.org/presentationml/2006/main" xmlns:r="http://schemas.openxmlformats.org/officeDocument/2006/relationships">
-  <p:cSld>
-    <p:bg>
-      <p:bgPr>
-        <a:solidFill>
-          <a:srgbClr val="FAF9F6"/>
-        </a:solidFill>
-        <a:effectLst/>
-      </p:bgPr>
-    </p:bg>
-    <p:spTree>
-      <p:nvGrpSpPr>
-        <p:cNvPr id="1" name=""/>
-        <p:cNvGrpSpPr/>
-        <p:nvPr/>
-      </p:nvGrpSpPr>
-      <p:grpSpPr/>
-      <p:sp>
-        <p:nvSpPr>
-          <p:cNvPr id="2" name="Rectangle 1"/>
-          <p:cNvSpPr/>
-          <p:nvPr/>
-        </p:nvSpPr>
-        <p:spPr>
-          <a:xfrm>
-            <a:off x="841248" y="640080"/>
-            <a:ext cx="82296" cy="402336"/>
-          </a:xfrm>
-          <a:prstGeom prst="rect">
-            <a:avLst/>
-          </a:prstGeom>
-          <a:solidFill>
-            <a:srgbClr val="111110"/>
-          </a:solidFill>
-          <a:ln>
-            <a:noFill/>
-          </a:ln>
-          <a:effectLst/>
-        </p:spPr>
-        <p:style>
-          <a:lnRef idx="1">
-            <a:schemeClr val="accent1"/>
-          </a:lnRef>
-          <a:fillRef idx="3">
-            <a:schemeClr val="accent1"/>
-          </a:fillRef>
-          <a:effectRef idx="2">
-            <a:schemeClr val="accent1"/>
-          </a:effectRef>
-          <a:fontRef idx="minor">
-            <a:schemeClr val="lt1"/>
-          </a:fontRef>
-        </p:style>
-        <p:txBody>
-          <a:bodyPr rtlCol="0" anchor="ctr"/>
-          <a:lstStyle/>
-          <a:p>
-            <a:pPr algn="ctr"/>
-          </a:p>
-        </p:txBody>
-      </p:sp>
-      <p:sp>
-        <p:nvSpPr>
-          <p:cNvPr id="3" name="TextBox 2"/>
-          <p:cNvSpPr txBox="1"/>
-          <p:nvPr/>
-        </p:nvSpPr>
-        <p:spPr>
-          <a:xfrm>
-            <a:off x="1097280" y="548640"/>
-            <a:ext cx="10253167" cy="786384"/>
-          </a:xfrm>
-          <a:prstGeom prst="rect">
-            <a:avLst/>
-          </a:prstGeom>
-          <a:noFill/>
-        </p:spPr>
-        <p:txBody>
-          <a:bodyPr wrap="square" lIns="0" rIns="0" tIns="0" bIns="0" anchor="t">
-            <a:spAutoFit/>
-          </a:bodyPr>
-          <a:lstStyle/>
-          <a:p>
-            <a:pPr>
-              <a:lnSpc>
-                <a:spcPct val="120000"/>
-              </a:lnSpc>
-            </a:pPr>
-            <a:r>
-              <a:rPr sz="2400" b="1" i="0">
-                <a:solidFill>
-                  <a:srgbClr val="111110"/>
-                </a:solidFill>
-                <a:latin typeface="Lato"/>
-                <a:ea typeface="Noto Sans JP"/>
-                <a:cs typeface="Noto Sans JP"/>
-              </a:rPr>
-              <a:t>2026-10-07 に AWS で 1 回立て、5 つとも動いて端から端までつながった</a:t>
             </a:r>
           </a:p>
         </p:txBody>
@@ -9083,7 +8821,1234 @@
         </p:nvGraphicFramePr>
         <p:xfrm>
           <a:off x="841248" y="1755648"/>
-          <a:ext cx="10509199" cy="3807460"/>
+          <a:ext cx="10509199" cy="4088638"/>
+        </p:xfrm>
+        <a:graphic>
+          <a:graphicData uri="http://schemas.openxmlformats.org/drawingml/2006/table">
+            <a:tbl>
+              <a:tblPr firstRow="1" bandRow="0"/>
+              <a:tblGrid>
+                <a:gridCol w="3503066"/>
+                <a:gridCol w="3503066"/>
+                <a:gridCol w="3503067"/>
+              </a:tblGrid>
+              <a:tr h="538480">
+                <a:tc>
+                  <a:txBody>
+                    <a:bodyPr wrap="square"/>
+                    <a:lstStyle/>
+                    <a:p>
+                      <a:pPr>
+                        <a:lnSpc>
+                          <a:spcPct val="135000"/>
+                        </a:lnSpc>
+                      </a:pPr>
+                      <a:r>
+                        <a:rPr sz="1639" b="1" i="0">
+                          <a:solidFill>
+                            <a:srgbClr val="111110"/>
+                          </a:solidFill>
+                          <a:latin typeface="Lato"/>
+                          <a:ea typeface="Noto Sans JP"/>
+                          <a:cs typeface="Noto Sans JP"/>
+                        </a:rPr>
+                        <a:t>送り元</a:t>
+                      </a:r>
+                    </a:p>
+                  </a:txBody>
+                  <a:tcPr marL="91440" marR="91440" marT="45720" marB="45720" anchor="ctr">
+                    <a:lnB w="15240" cap="flat">
+                      <a:solidFill>
+                        <a:srgbClr val="111110"/>
+                      </a:solidFill>
+                    </a:lnB>
+                    <a:noFill/>
+                  </a:tcPr>
+                </a:tc>
+                <a:tc>
+                  <a:txBody>
+                    <a:bodyPr wrap="square"/>
+                    <a:lstStyle/>
+                    <a:p>
+                      <a:pPr>
+                        <a:lnSpc>
+                          <a:spcPct val="135000"/>
+                        </a:lnSpc>
+                      </a:pPr>
+                      <a:r>
+                        <a:rPr sz="1639" b="1" i="0">
+                          <a:solidFill>
+                            <a:srgbClr val="111110"/>
+                          </a:solidFill>
+                          <a:latin typeface="Lato"/>
+                          <a:ea typeface="Noto Sans JP"/>
+                          <a:cs typeface="Noto Sans JP"/>
+                        </a:rPr>
+                        <a:t>宛先</a:t>
+                      </a:r>
+                    </a:p>
+                  </a:txBody>
+                  <a:tcPr marL="91440" marR="91440" marT="45720" marB="45720" anchor="ctr">
+                    <a:lnB w="15240" cap="flat">
+                      <a:solidFill>
+                        <a:srgbClr val="111110"/>
+                      </a:solidFill>
+                    </a:lnB>
+                    <a:noFill/>
+                  </a:tcPr>
+                </a:tc>
+                <a:tc>
+                  <a:txBody>
+                    <a:bodyPr wrap="square"/>
+                    <a:lstStyle/>
+                    <a:p>
+                      <a:pPr>
+                        <a:lnSpc>
+                          <a:spcPct val="135000"/>
+                        </a:lnSpc>
+                      </a:pPr>
+                      <a:r>
+                        <a:rPr sz="1639" b="1" i="0">
+                          <a:solidFill>
+                            <a:srgbClr val="111110"/>
+                          </a:solidFill>
+                          <a:latin typeface="Lato"/>
+                          <a:ea typeface="Noto Sans JP"/>
+                          <a:cs typeface="Noto Sans JP"/>
+                        </a:rPr>
+                        <a:t>ポート</a:t>
+                      </a:r>
+                    </a:p>
+                  </a:txBody>
+                  <a:tcPr marL="91440" marR="91440" marT="45720" marB="45720" anchor="ctr">
+                    <a:lnB w="15240" cap="flat">
+                      <a:solidFill>
+                        <a:srgbClr val="111110"/>
+                      </a:solidFill>
+                    </a:lnB>
+                    <a:noFill/>
+                  </a:tcPr>
+                </a:tc>
+              </a:tr>
+              <a:tr h="653796">
+                <a:tc>
+                  <a:txBody>
+                    <a:bodyPr wrap="square"/>
+                    <a:lstStyle/>
+                    <a:p>
+                      <a:pPr>
+                        <a:lnSpc>
+                          <a:spcPct val="135000"/>
+                        </a:lnSpc>
+                      </a:pPr>
+                      <a:r>
+                        <a:rPr sz="1639" b="0" i="0">
+                          <a:solidFill>
+                            <a:srgbClr val="1A1A1A"/>
+                          </a:solidFill>
+                          <a:latin typeface="Lato"/>
+                          <a:ea typeface="Noto Sans JP"/>
+                          <a:cs typeface="Noto Sans JP"/>
+                        </a:rPr>
+                        <a:t>収集 4 種・spark・web</a:t>
+                      </a:r>
+                    </a:p>
+                  </a:txBody>
+                  <a:tcPr marL="91440" marR="91440" marT="45720" marB="45720" anchor="ctr">
+                    <a:lnB w="9525" cap="flat">
+                      <a:solidFill>
+                        <a:srgbClr val="DFDFDF"/>
+                      </a:solidFill>
+                    </a:lnB>
+                    <a:noFill/>
+                  </a:tcPr>
+                </a:tc>
+                <a:tc>
+                  <a:txBody>
+                    <a:bodyPr wrap="square"/>
+                    <a:lstStyle/>
+                    <a:p>
+                      <a:pPr>
+                        <a:lnSpc>
+                          <a:spcPct val="135000"/>
+                        </a:lnSpc>
+                      </a:pPr>
+                      <a:r>
+                        <a:rPr sz="1639" b="0" i="0">
+                          <a:solidFill>
+                            <a:srgbClr val="1A1A1A"/>
+                          </a:solidFill>
+                          <a:latin typeface="Lato"/>
+                          <a:ea typeface="Noto Sans JP"/>
+                          <a:cs typeface="Noto Sans JP"/>
+                        </a:rPr>
+                        <a:t>kafka</a:t>
+                      </a:r>
+                    </a:p>
+                  </a:txBody>
+                  <a:tcPr marL="91440" marR="91440" marT="45720" marB="45720" anchor="ctr">
+                    <a:lnB w="9525" cap="flat">
+                      <a:solidFill>
+                        <a:srgbClr val="DFDFDF"/>
+                      </a:solidFill>
+                    </a:lnB>
+                    <a:noFill/>
+                  </a:tcPr>
+                </a:tc>
+                <a:tc>
+                  <a:txBody>
+                    <a:bodyPr wrap="square"/>
+                    <a:lstStyle/>
+                    <a:p>
+                      <a:pPr>
+                        <a:lnSpc>
+                          <a:spcPct val="135000"/>
+                        </a:lnSpc>
+                      </a:pPr>
+                      <a:r>
+                        <a:rPr sz="1639" b="0" i="0">
+                          <a:solidFill>
+                            <a:srgbClr val="1A1A1A"/>
+                          </a:solidFill>
+                          <a:latin typeface="Lato"/>
+                          <a:ea typeface="Noto Sans JP"/>
+                          <a:cs typeface="Noto Sans JP"/>
+                        </a:rPr>
+                        <a:t>9092（認証なし）</a:t>
+                      </a:r>
+                    </a:p>
+                  </a:txBody>
+                  <a:tcPr marL="91440" marR="91440" marT="45720" marB="45720" anchor="ctr">
+                    <a:lnB w="9525" cap="flat">
+                      <a:solidFill>
+                        <a:srgbClr val="DFDFDF"/>
+                      </a:solidFill>
+                    </a:lnB>
+                    <a:noFill/>
+                  </a:tcPr>
+                </a:tc>
+              </a:tr>
+              <a:tr h="653796">
+                <a:tc>
+                  <a:txBody>
+                    <a:bodyPr wrap="square"/>
+                    <a:lstStyle/>
+                    <a:p>
+                      <a:pPr>
+                        <a:lnSpc>
+                          <a:spcPct val="135000"/>
+                        </a:lnSpc>
+                      </a:pPr>
+                      <a:r>
+                        <a:rPr sz="1639" b="0" i="0">
+                          <a:solidFill>
+                            <a:srgbClr val="1A1A1A"/>
+                          </a:solidFill>
+                          <a:latin typeface="Lato"/>
+                          <a:ea typeface="Noto Sans JP"/>
+                          <a:cs typeface="Noto Sans JP"/>
+                        </a:rPr>
+                        <a:t>kafka・victoriametrics</a:t>
+                      </a:r>
+                    </a:p>
+                  </a:txBody>
+                  <a:tcPr marL="91440" marR="91440" marT="45720" marB="45720" anchor="ctr">
+                    <a:lnB w="9525" cap="flat">
+                      <a:solidFill>
+                        <a:srgbClr val="DFDFDF"/>
+                      </a:solidFill>
+                    </a:lnB>
+                    <a:noFill/>
+                  </a:tcPr>
+                </a:tc>
+                <a:tc>
+                  <a:txBody>
+                    <a:bodyPr wrap="square"/>
+                    <a:lstStyle/>
+                    <a:p>
+                      <a:pPr>
+                        <a:lnSpc>
+                          <a:spcPct val="135000"/>
+                        </a:lnSpc>
+                      </a:pPr>
+                      <a:r>
+                        <a:rPr sz="1639" b="0" i="0">
+                          <a:solidFill>
+                            <a:srgbClr val="1A1A1A"/>
+                          </a:solidFill>
+                          <a:latin typeface="Lato"/>
+                          <a:ea typeface="Noto Sans JP"/>
+                          <a:cs typeface="Noto Sans JP"/>
+                        </a:rPr>
+                        <a:t>efs</a:t>
+                      </a:r>
+                    </a:p>
+                  </a:txBody>
+                  <a:tcPr marL="91440" marR="91440" marT="45720" marB="45720" anchor="ctr">
+                    <a:lnB w="9525" cap="flat">
+                      <a:solidFill>
+                        <a:srgbClr val="DFDFDF"/>
+                      </a:solidFill>
+                    </a:lnB>
+                    <a:noFill/>
+                  </a:tcPr>
+                </a:tc>
+                <a:tc>
+                  <a:txBody>
+                    <a:bodyPr wrap="square"/>
+                    <a:lstStyle/>
+                    <a:p>
+                      <a:pPr>
+                        <a:lnSpc>
+                          <a:spcPct val="135000"/>
+                        </a:lnSpc>
+                      </a:pPr>
+                      <a:r>
+                        <a:rPr sz="1639" b="0" i="0">
+                          <a:solidFill>
+                            <a:srgbClr val="1A1A1A"/>
+                          </a:solidFill>
+                          <a:latin typeface="Lato"/>
+                          <a:ea typeface="Noto Sans JP"/>
+                          <a:cs typeface="Noto Sans JP"/>
+                        </a:rPr>
+                        <a:t>2049（NFS・TLS）</a:t>
+                      </a:r>
+                    </a:p>
+                  </a:txBody>
+                  <a:tcPr marL="91440" marR="91440" marT="45720" marB="45720" anchor="ctr">
+                    <a:lnB w="9525" cap="flat">
+                      <a:solidFill>
+                        <a:srgbClr val="DFDFDF"/>
+                      </a:solidFill>
+                    </a:lnB>
+                    <a:noFill/>
+                  </a:tcPr>
+                </a:tc>
+              </a:tr>
+              <a:tr h="653796">
+                <a:tc>
+                  <a:txBody>
+                    <a:bodyPr wrap="square"/>
+                    <a:lstStyle/>
+                    <a:p>
+                      <a:pPr>
+                        <a:lnSpc>
+                          <a:spcPct val="135000"/>
+                        </a:lnSpc>
+                      </a:pPr>
+                      <a:r>
+                        <a:rPr sz="1639" b="0" i="0">
+                          <a:solidFill>
+                            <a:srgbClr val="1A1A1A"/>
+                          </a:solidFill>
+                          <a:latin typeface="Lato"/>
+                          <a:ea typeface="Noto Sans JP"/>
+                          <a:cs typeface="Noto Sans JP"/>
+                        </a:rPr>
+                        <a:t>spark・grafana・runtime・lambda</a:t>
+                      </a:r>
+                    </a:p>
+                  </a:txBody>
+                  <a:tcPr marL="91440" marR="91440" marT="45720" marB="45720" anchor="ctr">
+                    <a:lnB w="9525" cap="flat">
+                      <a:solidFill>
+                        <a:srgbClr val="DFDFDF"/>
+                      </a:solidFill>
+                    </a:lnB>
+                    <a:noFill/>
+                  </a:tcPr>
+                </a:tc>
+                <a:tc>
+                  <a:txBody>
+                    <a:bodyPr wrap="square"/>
+                    <a:lstStyle/>
+                    <a:p>
+                      <a:pPr>
+                        <a:lnSpc>
+                          <a:spcPct val="135000"/>
+                        </a:lnSpc>
+                      </a:pPr>
+                      <a:r>
+                        <a:rPr sz="1639" b="0" i="0">
+                          <a:solidFill>
+                            <a:srgbClr val="1A1A1A"/>
+                          </a:solidFill>
+                          <a:latin typeface="Lato"/>
+                          <a:ea typeface="Noto Sans JP"/>
+                          <a:cs typeface="Noto Sans JP"/>
+                        </a:rPr>
+                        <a:t>opensearch</a:t>
+                      </a:r>
+                    </a:p>
+                  </a:txBody>
+                  <a:tcPr marL="91440" marR="91440" marT="45720" marB="45720" anchor="ctr">
+                    <a:lnB w="9525" cap="flat">
+                      <a:solidFill>
+                        <a:srgbClr val="DFDFDF"/>
+                      </a:solidFill>
+                    </a:lnB>
+                    <a:noFill/>
+                  </a:tcPr>
+                </a:tc>
+                <a:tc>
+                  <a:txBody>
+                    <a:bodyPr wrap="square"/>
+                    <a:lstStyle/>
+                    <a:p>
+                      <a:pPr>
+                        <a:lnSpc>
+                          <a:spcPct val="135000"/>
+                        </a:lnSpc>
+                      </a:pPr>
+                      <a:r>
+                        <a:rPr sz="1639" b="0" i="0">
+                          <a:solidFill>
+                            <a:srgbClr val="1A1A1A"/>
+                          </a:solidFill>
+                          <a:latin typeface="Lato"/>
+                          <a:ea typeface="Noto Sans JP"/>
+                          <a:cs typeface="Noto Sans JP"/>
+                        </a:rPr>
+                        <a:t>9200（REST）</a:t>
+                      </a:r>
+                    </a:p>
+                  </a:txBody>
+                  <a:tcPr marL="91440" marR="91440" marT="45720" marB="45720" anchor="ctr">
+                    <a:lnB w="9525" cap="flat">
+                      <a:solidFill>
+                        <a:srgbClr val="DFDFDF"/>
+                      </a:solidFill>
+                    </a:lnB>
+                    <a:noFill/>
+                  </a:tcPr>
+                </a:tc>
+              </a:tr>
+              <a:tr h="653796">
+                <a:tc>
+                  <a:txBody>
+                    <a:bodyPr wrap="square"/>
+                    <a:lstStyle/>
+                    <a:p>
+                      <a:pPr>
+                        <a:lnSpc>
+                          <a:spcPct val="135000"/>
+                        </a:lnSpc>
+                      </a:pPr>
+                      <a:r>
+                        <a:rPr sz="1639" b="0" i="0">
+                          <a:solidFill>
+                            <a:srgbClr val="1A1A1A"/>
+                          </a:solidFill>
+                          <a:latin typeface="Lato"/>
+                          <a:ea typeface="Noto Sans JP"/>
+                          <a:cs typeface="Noto Sans JP"/>
+                        </a:rPr>
+                        <a:t>spark・grafana・runtime・lambda</a:t>
+                      </a:r>
+                    </a:p>
+                  </a:txBody>
+                  <a:tcPr marL="91440" marR="91440" marT="45720" marB="45720" anchor="ctr">
+                    <a:lnB w="9525" cap="flat">
+                      <a:solidFill>
+                        <a:srgbClr val="DFDFDF"/>
+                      </a:solidFill>
+                    </a:lnB>
+                    <a:noFill/>
+                  </a:tcPr>
+                </a:tc>
+                <a:tc>
+                  <a:txBody>
+                    <a:bodyPr wrap="square"/>
+                    <a:lstStyle/>
+                    <a:p>
+                      <a:pPr>
+                        <a:lnSpc>
+                          <a:spcPct val="135000"/>
+                        </a:lnSpc>
+                      </a:pPr>
+                      <a:r>
+                        <a:rPr sz="1639" b="0" i="0">
+                          <a:solidFill>
+                            <a:srgbClr val="1A1A1A"/>
+                          </a:solidFill>
+                          <a:latin typeface="Lato"/>
+                          <a:ea typeface="Noto Sans JP"/>
+                          <a:cs typeface="Noto Sans JP"/>
+                        </a:rPr>
+                        <a:t>victoriametrics</a:t>
+                      </a:r>
+                    </a:p>
+                  </a:txBody>
+                  <a:tcPr marL="91440" marR="91440" marT="45720" marB="45720" anchor="ctr">
+                    <a:lnB w="9525" cap="flat">
+                      <a:solidFill>
+                        <a:srgbClr val="DFDFDF"/>
+                      </a:solidFill>
+                    </a:lnB>
+                    <a:noFill/>
+                  </a:tcPr>
+                </a:tc>
+                <a:tc>
+                  <a:txBody>
+                    <a:bodyPr wrap="square"/>
+                    <a:lstStyle/>
+                    <a:p>
+                      <a:pPr>
+                        <a:lnSpc>
+                          <a:spcPct val="135000"/>
+                        </a:lnSpc>
+                      </a:pPr>
+                      <a:r>
+                        <a:rPr sz="1639" b="0" i="0">
+                          <a:solidFill>
+                            <a:srgbClr val="1A1A1A"/>
+                          </a:solidFill>
+                          <a:latin typeface="Lato"/>
+                          <a:ea typeface="Noto Sans JP"/>
+                          <a:cs typeface="Noto Sans JP"/>
+                        </a:rPr>
+                        <a:t>8480・8481</a:t>
+                      </a:r>
+                    </a:p>
+                  </a:txBody>
+                  <a:tcPr marL="91440" marR="91440" marT="45720" marB="45720" anchor="ctr">
+                    <a:lnB w="9525" cap="flat">
+                      <a:solidFill>
+                        <a:srgbClr val="DFDFDF"/>
+                      </a:solidFill>
+                    </a:lnB>
+                    <a:noFill/>
+                  </a:tcPr>
+                </a:tc>
+              </a:tr>
+              <a:tr h="934974">
+                <a:tc>
+                  <a:txBody>
+                    <a:bodyPr wrap="square"/>
+                    <a:lstStyle/>
+                    <a:p>
+                      <a:pPr>
+                        <a:lnSpc>
+                          <a:spcPct val="135000"/>
+                        </a:lnSpc>
+                      </a:pPr>
+                      <a:r>
+                        <a:rPr sz="1639" b="0" i="0">
+                          <a:solidFill>
+                            <a:srgbClr val="1A1A1A"/>
+                          </a:solidFill>
+                          <a:latin typeface="Lato"/>
+                          <a:ea typeface="Noto Sans JP"/>
+                          <a:cs typeface="Noto Sans JP"/>
+                        </a:rPr>
+                        <a:t>web・runtime・lambda・workflow・nautobot</a:t>
+                      </a:r>
+                    </a:p>
+                  </a:txBody>
+                  <a:tcPr marL="91440" marR="91440" marT="45720" marB="45720" anchor="ctr">
+                    <a:lnB w="9525" cap="flat">
+                      <a:solidFill>
+                        <a:srgbClr val="DFDFDF"/>
+                      </a:solidFill>
+                    </a:lnB>
+                    <a:noFill/>
+                  </a:tcPr>
+                </a:tc>
+                <a:tc>
+                  <a:txBody>
+                    <a:bodyPr wrap="square"/>
+                    <a:lstStyle/>
+                    <a:p>
+                      <a:pPr>
+                        <a:lnSpc>
+                          <a:spcPct val="135000"/>
+                        </a:lnSpc>
+                      </a:pPr>
+                      <a:r>
+                        <a:rPr sz="1639" b="0" i="0">
+                          <a:solidFill>
+                            <a:srgbClr val="1A1A1A"/>
+                          </a:solidFill>
+                          <a:latin typeface="Lato"/>
+                          <a:ea typeface="Noto Sans JP"/>
+                          <a:cs typeface="Noto Sans JP"/>
+                        </a:rPr>
+                        <a:t>neo4j</a:t>
+                      </a:r>
+                    </a:p>
+                  </a:txBody>
+                  <a:tcPr marL="91440" marR="91440" marT="45720" marB="45720" anchor="ctr">
+                    <a:lnB w="9525" cap="flat">
+                      <a:solidFill>
+                        <a:srgbClr val="DFDFDF"/>
+                      </a:solidFill>
+                    </a:lnB>
+                    <a:noFill/>
+                  </a:tcPr>
+                </a:tc>
+                <a:tc>
+                  <a:txBody>
+                    <a:bodyPr wrap="square"/>
+                    <a:lstStyle/>
+                    <a:p>
+                      <a:pPr>
+                        <a:lnSpc>
+                          <a:spcPct val="135000"/>
+                        </a:lnSpc>
+                      </a:pPr>
+                      <a:r>
+                        <a:rPr sz="1639" b="0" i="0">
+                          <a:solidFill>
+                            <a:srgbClr val="1A1A1A"/>
+                          </a:solidFill>
+                          <a:latin typeface="Lato"/>
+                          <a:ea typeface="Noto Sans JP"/>
+                          <a:cs typeface="Noto Sans JP"/>
+                        </a:rPr>
+                        <a:t>7687（Bolt）</a:t>
+                      </a:r>
+                    </a:p>
+                  </a:txBody>
+                  <a:tcPr marL="91440" marR="91440" marT="45720" marB="45720" anchor="ctr">
+                    <a:lnB w="9525" cap="flat">
+                      <a:solidFill>
+                        <a:srgbClr val="DFDFDF"/>
+                      </a:solidFill>
+                    </a:lnB>
+                    <a:noFill/>
+                  </a:tcPr>
+                </a:tc>
+              </a:tr>
+            </a:tbl>
+          </a:graphicData>
+        </a:graphic>
+      </p:graphicFrame>
+      <p:sp>
+        <p:nvSpPr>
+          <p:cNvPr id="6" name="TextBox 5"/>
+          <p:cNvSpPr txBox="1"/>
+          <p:nvPr/>
+        </p:nvSpPr>
+        <p:spPr>
+          <a:xfrm>
+            <a:off x="841248" y="6272784"/>
+            <a:ext cx="10509199" cy="274320"/>
+          </a:xfrm>
+          <a:prstGeom prst="rect">
+            <a:avLst/>
+          </a:prstGeom>
+          <a:noFill/>
+        </p:spPr>
+        <p:txBody>
+          <a:bodyPr wrap="square" lIns="0" rIns="0" tIns="0" bIns="0" anchor="t">
+            <a:spAutoFit/>
+          </a:bodyPr>
+          <a:lstStyle/>
+          <a:p>
+            <a:pPr algn="r"/>
+            <a:r>
+              <a:rPr sz="1000" b="0" i="0">
+                <a:solidFill>
+                  <a:srgbClr val="A5A5A5"/>
+                </a:solidFill>
+                <a:latin typeface="Menlo"/>
+                <a:ea typeface="Menlo"/>
+                <a:cs typeface="Menlo"/>
+              </a:rPr>
+              <a:t>7 / 10</a:t>
+            </a:r>
+          </a:p>
+        </p:txBody>
+      </p:sp>
+    </p:spTree>
+  </p:cSld>
+  <p:clrMapOvr>
+    <a:masterClrMapping/>
+  </p:clrMapOvr>
+</p:sld>
+</file>
+
+<file path=ppt/slides/slide8.xml><?xml version="1.0" encoding="utf-8"?>
+<p:sld xmlns:a="http://schemas.openxmlformats.org/drawingml/2006/main" xmlns:p="http://schemas.openxmlformats.org/presentationml/2006/main" xmlns:r="http://schemas.openxmlformats.org/officeDocument/2006/relationships">
+  <p:cSld>
+    <p:bg>
+      <p:bgPr>
+        <a:solidFill>
+          <a:srgbClr val="FAF9F6"/>
+        </a:solidFill>
+        <a:effectLst/>
+      </p:bgPr>
+    </p:bg>
+    <p:spTree>
+      <p:nvGrpSpPr>
+        <p:cNvPr id="1" name=""/>
+        <p:cNvGrpSpPr/>
+        <p:nvPr/>
+      </p:nvGrpSpPr>
+      <p:grpSpPr/>
+      <p:sp>
+        <p:nvSpPr>
+          <p:cNvPr id="2" name="Rectangle 1"/>
+          <p:cNvSpPr/>
+          <p:nvPr/>
+        </p:nvSpPr>
+        <p:spPr>
+          <a:xfrm>
+            <a:off x="841248" y="640080"/>
+            <a:ext cx="82296" cy="402336"/>
+          </a:xfrm>
+          <a:prstGeom prst="rect">
+            <a:avLst/>
+          </a:prstGeom>
+          <a:solidFill>
+            <a:srgbClr val="111110"/>
+          </a:solidFill>
+          <a:ln>
+            <a:noFill/>
+          </a:ln>
+          <a:effectLst/>
+        </p:spPr>
+        <p:style>
+          <a:lnRef idx="1">
+            <a:schemeClr val="accent1"/>
+          </a:lnRef>
+          <a:fillRef idx="3">
+            <a:schemeClr val="accent1"/>
+          </a:fillRef>
+          <a:effectRef idx="2">
+            <a:schemeClr val="accent1"/>
+          </a:effectRef>
+          <a:fontRef idx="minor">
+            <a:schemeClr val="lt1"/>
+          </a:fontRef>
+        </p:style>
+        <p:txBody>
+          <a:bodyPr rtlCol="0" anchor="ctr"/>
+          <a:lstStyle/>
+          <a:p>
+            <a:pPr algn="ctr"/>
+          </a:p>
+        </p:txBody>
+      </p:sp>
+      <p:sp>
+        <p:nvSpPr>
+          <p:cNvPr id="3" name="TextBox 2"/>
+          <p:cNvSpPr txBox="1"/>
+          <p:nvPr/>
+        </p:nvSpPr>
+        <p:spPr>
+          <a:xfrm>
+            <a:off x="1097280" y="548640"/>
+            <a:ext cx="10253167" cy="786384"/>
+          </a:xfrm>
+          <a:prstGeom prst="rect">
+            <a:avLst/>
+          </a:prstGeom>
+          <a:noFill/>
+        </p:spPr>
+        <p:txBody>
+          <a:bodyPr wrap="square" lIns="0" rIns="0" tIns="0" bIns="0" anchor="t">
+            <a:spAutoFit/>
+          </a:bodyPr>
+          <a:lstStyle/>
+          <a:p>
+            <a:pPr>
+              <a:lnSpc>
+                <a:spcPct val="120000"/>
+              </a:lnSpc>
+            </a:pPr>
+            <a:r>
+              <a:rPr sz="2400" b="1" i="0">
+                <a:solidFill>
+                  <a:srgbClr val="111110"/>
+                </a:solidFill>
+                <a:latin typeface="Lato"/>
+                <a:ea typeface="Noto Sans JP"/>
+                <a:cs typeface="Noto Sans JP"/>
+              </a:rPr>
+              <a:t>ops/oss/up.sh は同じ 9 ルートを作り、down.sh が逆の順に消す</a:t>
+            </a:r>
+          </a:p>
+        </p:txBody>
+      </p:sp>
+      <p:cxnSp>
+        <p:nvCxnSpPr>
+          <p:cNvPr id="4" name="Connector 3"/>
+          <p:cNvCxnSpPr/>
+          <p:nvPr/>
+        </p:nvCxnSpPr>
+        <p:spPr>
+          <a:xfrm>
+            <a:off x="841248" y="1426464"/>
+            <a:ext cx="10509199" cy="0"/>
+          </a:xfrm>
+          <a:prstGeom prst="line">
+            <a:avLst/>
+          </a:prstGeom>
+          <a:ln w="12700">
+            <a:solidFill>
+              <a:srgbClr val="DFDFDF"/>
+            </a:solidFill>
+          </a:ln>
+        </p:spPr>
+        <p:style>
+          <a:lnRef idx="2">
+            <a:schemeClr val="accent1"/>
+          </a:lnRef>
+          <a:fillRef idx="0">
+            <a:schemeClr val="accent1"/>
+          </a:fillRef>
+          <a:effectRef idx="1">
+            <a:schemeClr val="accent1"/>
+          </a:effectRef>
+          <a:fontRef idx="minor">
+            <a:schemeClr val="tx1"/>
+          </a:fontRef>
+        </p:style>
+      </p:cxnSp>
+      <p:sp>
+        <p:nvSpPr>
+          <p:cNvPr id="5" name="TextBox 4"/>
+          <p:cNvSpPr txBox="1"/>
+          <p:nvPr/>
+        </p:nvSpPr>
+        <p:spPr>
+          <a:xfrm>
+            <a:off x="841248" y="1755648"/>
+            <a:ext cx="10509199" cy="3426460"/>
+          </a:xfrm>
+          <a:prstGeom prst="rect">
+            <a:avLst/>
+          </a:prstGeom>
+          <a:noFill/>
+        </p:spPr>
+        <p:txBody>
+          <a:bodyPr wrap="square" lIns="0" rIns="0" tIns="0" bIns="0" anchor="t">
+            <a:spAutoFit/>
+          </a:bodyPr>
+          <a:lstStyle/>
+          <a:p>
+            <a:pPr marL="0" indent="0">
+              <a:lnSpc>
+                <a:spcPct val="155000"/>
+              </a:lnSpc>
+              <a:spcAft>
+                <a:spcPts val="880"/>
+              </a:spcAft>
+            </a:pPr>
+            <a:r>
+              <a:rPr sz="2000" b="0" i="0">
+                <a:solidFill>
+                  <a:srgbClr val="D63A2F"/>
+                </a:solidFill>
+                <a:latin typeface="Lato"/>
+                <a:ea typeface="Noto Sans JP"/>
+                <a:cs typeface="Noto Sans JP"/>
+              </a:rPr>
+              <a:t>・</a:t>
+            </a:r>
+            <a:r>
+              <a:rPr sz="2000" b="0" i="0">
+                <a:solidFill>
+                  <a:srgbClr val="1A1A1A"/>
+                </a:solidFill>
+                <a:latin typeface="Lato"/>
+                <a:ea typeface="Noto Sans JP"/>
+                <a:cs typeface="Noto Sans JP"/>
+              </a:rPr>
+              <a:t>格納先は 4 つ全部と Grafana をいつも作る。KB は作らない</a:t>
+            </a:r>
+          </a:p>
+          <a:p>
+            <a:pPr marL="0" indent="0">
+              <a:lnSpc>
+                <a:spcPct val="155000"/>
+              </a:lnSpc>
+              <a:spcAft>
+                <a:spcPts val="880"/>
+              </a:spcAft>
+            </a:pPr>
+            <a:r>
+              <a:rPr sz="2000" b="0" i="0">
+                <a:solidFill>
+                  <a:srgbClr val="D63A2F"/>
+                </a:solidFill>
+                <a:latin typeface="Lato"/>
+                <a:ea typeface="Noto Sans JP"/>
+                <a:cs typeface="Noto Sans JP"/>
+              </a:rPr>
+              <a:t>・</a:t>
+            </a:r>
+            <a:r>
+              <a:rPr sz="2000" b="0" i="0">
+                <a:solidFill>
+                  <a:srgbClr val="1A1A1A"/>
+                </a:solidFill>
+                <a:latin typeface="Lato"/>
+                <a:ea typeface="Noto Sans JP"/>
+                <a:cs typeface="Noto Sans JP"/>
+              </a:rPr>
+              <a:t>打ち直しでは Kafka と OpenSearch を 1 台ずつ入れ替える</a:t>
+            </a:r>
+          </a:p>
+          <a:p>
+            <a:pPr marL="0" indent="0">
+              <a:lnSpc>
+                <a:spcPct val="155000"/>
+              </a:lnSpc>
+              <a:spcAft>
+                <a:spcPts val="880"/>
+              </a:spcAft>
+            </a:pPr>
+            <a:r>
+              <a:rPr sz="2000" b="0" i="0">
+                <a:solidFill>
+                  <a:srgbClr val="D63A2F"/>
+                </a:solidFill>
+                <a:latin typeface="Lato"/>
+                <a:ea typeface="Noto Sans JP"/>
+                <a:cs typeface="Noto Sans JP"/>
+              </a:rPr>
+              <a:t>・</a:t>
+            </a:r>
+            <a:r>
+              <a:rPr sz="2000" b="0" i="0">
+                <a:solidFill>
+                  <a:srgbClr val="1A1A1A"/>
+                </a:solidFill>
+                <a:latin typeface="Lato"/>
+                <a:ea typeface="Noto Sans JP"/>
+                <a:cs typeface="Noto Sans JP"/>
+              </a:rPr>
+              <a:t>消すのは接頭辞 </a:t>
+            </a:r>
+            <a:r>
+              <a:rPr sz="1879" b="0" i="0">
+                <a:solidFill>
+                  <a:srgbClr val="1A1A1A"/>
+                </a:solidFill>
+                <a:latin typeface="Menlo"/>
+                <a:ea typeface="Menlo"/>
+                <a:cs typeface="Menlo"/>
+              </a:rPr>
+              <a:t>&lt;owner&gt;-nwc-oss</a:t>
+            </a:r>
+            <a:r>
+              <a:rPr sz="2000" b="0" i="0">
+                <a:solidFill>
+                  <a:srgbClr val="1A1A1A"/>
+                </a:solidFill>
+                <a:latin typeface="Lato"/>
+                <a:ea typeface="Noto Sans JP"/>
+                <a:cs typeface="Noto Sans JP"/>
+              </a:rPr>
+              <a:t> のものだけ</a:t>
+            </a:r>
+          </a:p>
+          <a:p>
+            <a:pPr marL="0" indent="0">
+              <a:lnSpc>
+                <a:spcPct val="155000"/>
+              </a:lnSpc>
+              <a:spcAft>
+                <a:spcPts val="880"/>
+              </a:spcAft>
+            </a:pPr>
+            <a:r>
+              <a:rPr sz="2000" b="0" i="0">
+                <a:solidFill>
+                  <a:srgbClr val="D63A2F"/>
+                </a:solidFill>
+                <a:latin typeface="Lato"/>
+                <a:ea typeface="Noto Sans JP"/>
+                <a:cs typeface="Noto Sans JP"/>
+              </a:rPr>
+              <a:t>・</a:t>
+            </a:r>
+            <a:r>
+              <a:rPr sz="1879" b="0" i="0">
+                <a:solidFill>
+                  <a:srgbClr val="1A1A1A"/>
+                </a:solidFill>
+                <a:latin typeface="Menlo"/>
+                <a:ea typeface="Menlo"/>
+                <a:cs typeface="Menlo"/>
+              </a:rPr>
+              <a:t>KEEP_ECR=1</a:t>
+            </a:r>
+            <a:r>
+              <a:rPr sz="2000" b="0" i="0">
+                <a:solidFill>
+                  <a:srgbClr val="1A1A1A"/>
+                </a:solidFill>
+                <a:latin typeface="Lato"/>
+                <a:ea typeface="Noto Sans JP"/>
+                <a:cs typeface="Noto Sans JP"/>
+              </a:rPr>
+              <a:t> なら ECR を残す</a:t>
+            </a:r>
+          </a:p>
+          <a:p>
+            <a:pPr marL="0" indent="0">
+              <a:lnSpc>
+                <a:spcPct val="155000"/>
+              </a:lnSpc>
+              <a:spcAft>
+                <a:spcPts val="880"/>
+              </a:spcAft>
+            </a:pPr>
+            <a:r>
+              <a:rPr sz="2000" b="0" i="0">
+                <a:solidFill>
+                  <a:srgbClr val="D63A2F"/>
+                </a:solidFill>
+                <a:latin typeface="Lato"/>
+                <a:ea typeface="Noto Sans JP"/>
+                <a:cs typeface="Noto Sans JP"/>
+              </a:rPr>
+              <a:t>・</a:t>
+            </a:r>
+            <a:r>
+              <a:rPr sz="2000" b="0" i="0">
+                <a:solidFill>
+                  <a:srgbClr val="1A1A1A"/>
+                </a:solidFill>
+                <a:latin typeface="Lato"/>
+                <a:ea typeface="Noto Sans JP"/>
+                <a:cs typeface="Noto Sans JP"/>
+              </a:rPr>
+              <a:t>10-08 は 39 分で立ち、時間課金は約 $1.55/h の見積もり</a:t>
+            </a:r>
+          </a:p>
+          <a:p>
+            <a:pPr marL="0" indent="0">
+              <a:lnSpc>
+                <a:spcPct val="155000"/>
+              </a:lnSpc>
+              <a:spcAft>
+                <a:spcPts val="880"/>
+              </a:spcAft>
+            </a:pPr>
+            <a:r>
+              <a:rPr sz="2000" b="0" i="0">
+                <a:solidFill>
+                  <a:srgbClr val="D63A2F"/>
+                </a:solidFill>
+                <a:latin typeface="Lato"/>
+                <a:ea typeface="Noto Sans JP"/>
+                <a:cs typeface="Noto Sans JP"/>
+              </a:rPr>
+              <a:t>・</a:t>
+            </a:r>
+            <a:r>
+              <a:rPr sz="2000" b="0" i="0">
+                <a:solidFill>
+                  <a:srgbClr val="1A1A1A"/>
+                </a:solidFill>
+                <a:latin typeface="Lato"/>
+                <a:ea typeface="Noto Sans JP"/>
+                <a:cs typeface="Noto Sans JP"/>
+              </a:rPr>
+              <a:t>Fargate の vCPU を 21.5 使う（上限 30。10-08 に測った値）</a:t>
+            </a:r>
+          </a:p>
+        </p:txBody>
+      </p:sp>
+      <p:sp>
+        <p:nvSpPr>
+          <p:cNvPr id="6" name="TextBox 5"/>
+          <p:cNvSpPr txBox="1"/>
+          <p:nvPr/>
+        </p:nvSpPr>
+        <p:spPr>
+          <a:xfrm>
+            <a:off x="841248" y="6272784"/>
+            <a:ext cx="10509199" cy="274320"/>
+          </a:xfrm>
+          <a:prstGeom prst="rect">
+            <a:avLst/>
+          </a:prstGeom>
+          <a:noFill/>
+        </p:spPr>
+        <p:txBody>
+          <a:bodyPr wrap="square" lIns="0" rIns="0" tIns="0" bIns="0" anchor="t">
+            <a:spAutoFit/>
+          </a:bodyPr>
+          <a:lstStyle/>
+          <a:p>
+            <a:pPr algn="r"/>
+            <a:r>
+              <a:rPr sz="1000" b="0" i="0">
+                <a:solidFill>
+                  <a:srgbClr val="A5A5A5"/>
+                </a:solidFill>
+                <a:latin typeface="Menlo"/>
+                <a:ea typeface="Menlo"/>
+                <a:cs typeface="Menlo"/>
+              </a:rPr>
+              <a:t>8 / 10</a:t>
+            </a:r>
+          </a:p>
+        </p:txBody>
+      </p:sp>
+    </p:spTree>
+  </p:cSld>
+  <p:clrMapOvr>
+    <a:masterClrMapping/>
+  </p:clrMapOvr>
+</p:sld>
+</file>
+
+<file path=ppt/slides/slide9.xml><?xml version="1.0" encoding="utf-8"?>
+<p:sld xmlns:a="http://schemas.openxmlformats.org/drawingml/2006/main" xmlns:p="http://schemas.openxmlformats.org/presentationml/2006/main" xmlns:r="http://schemas.openxmlformats.org/officeDocument/2006/relationships">
+  <p:cSld>
+    <p:bg>
+      <p:bgPr>
+        <a:solidFill>
+          <a:srgbClr val="FAF9F6"/>
+        </a:solidFill>
+        <a:effectLst/>
+      </p:bgPr>
+    </p:bg>
+    <p:spTree>
+      <p:nvGrpSpPr>
+        <p:cNvPr id="1" name=""/>
+        <p:cNvGrpSpPr/>
+        <p:nvPr/>
+      </p:nvGrpSpPr>
+      <p:grpSpPr/>
+      <p:sp>
+        <p:nvSpPr>
+          <p:cNvPr id="2" name="Rectangle 1"/>
+          <p:cNvSpPr/>
+          <p:nvPr/>
+        </p:nvSpPr>
+        <p:spPr>
+          <a:xfrm>
+            <a:off x="841248" y="640080"/>
+            <a:ext cx="82296" cy="402336"/>
+          </a:xfrm>
+          <a:prstGeom prst="rect">
+            <a:avLst/>
+          </a:prstGeom>
+          <a:solidFill>
+            <a:srgbClr val="111110"/>
+          </a:solidFill>
+          <a:ln>
+            <a:noFill/>
+          </a:ln>
+          <a:effectLst/>
+        </p:spPr>
+        <p:style>
+          <a:lnRef idx="1">
+            <a:schemeClr val="accent1"/>
+          </a:lnRef>
+          <a:fillRef idx="3">
+            <a:schemeClr val="accent1"/>
+          </a:fillRef>
+          <a:effectRef idx="2">
+            <a:schemeClr val="accent1"/>
+          </a:effectRef>
+          <a:fontRef idx="minor">
+            <a:schemeClr val="lt1"/>
+          </a:fontRef>
+        </p:style>
+        <p:txBody>
+          <a:bodyPr rtlCol="0" anchor="ctr"/>
+          <a:lstStyle/>
+          <a:p>
+            <a:pPr algn="ctr"/>
+          </a:p>
+        </p:txBody>
+      </p:sp>
+      <p:sp>
+        <p:nvSpPr>
+          <p:cNvPr id="3" name="TextBox 2"/>
+          <p:cNvSpPr txBox="1"/>
+          <p:nvPr/>
+        </p:nvSpPr>
+        <p:spPr>
+          <a:xfrm>
+            <a:off x="1097280" y="548640"/>
+            <a:ext cx="10253167" cy="786384"/>
+          </a:xfrm>
+          <a:prstGeom prst="rect">
+            <a:avLst/>
+          </a:prstGeom>
+          <a:noFill/>
+        </p:spPr>
+        <p:txBody>
+          <a:bodyPr wrap="square" lIns="0" rIns="0" tIns="0" bIns="0" anchor="t">
+            <a:spAutoFit/>
+          </a:bodyPr>
+          <a:lstStyle/>
+          <a:p>
+            <a:pPr>
+              <a:lnSpc>
+                <a:spcPct val="120000"/>
+              </a:lnSpc>
+            </a:pPr>
+            <a:r>
+              <a:rPr sz="2400" b="1" i="0">
+                <a:solidFill>
+                  <a:srgbClr val="111110"/>
+                </a:solidFill>
+                <a:latin typeface="Lato"/>
+                <a:ea typeface="Noto Sans JP"/>
+                <a:cs typeface="Noto Sans JP"/>
+              </a:rPr>
+              <a:t>2026-10-08 に AWS で 2 回目を立て、5 つとも動いて端から端までつながった</a:t>
+            </a:r>
+          </a:p>
+        </p:txBody>
+      </p:sp>
+      <p:cxnSp>
+        <p:nvCxnSpPr>
+          <p:cNvPr id="4" name="Connector 3"/>
+          <p:cNvCxnSpPr/>
+          <p:nvPr/>
+        </p:nvCxnSpPr>
+        <p:spPr>
+          <a:xfrm>
+            <a:off x="841248" y="1426464"/>
+            <a:ext cx="10509199" cy="0"/>
+          </a:xfrm>
+          <a:prstGeom prst="line">
+            <a:avLst/>
+          </a:prstGeom>
+          <a:ln w="12700">
+            <a:solidFill>
+              <a:srgbClr val="DFDFDF"/>
+            </a:solidFill>
+          </a:ln>
+        </p:spPr>
+        <p:style>
+          <a:lnRef idx="2">
+            <a:schemeClr val="accent1"/>
+          </a:lnRef>
+          <a:fillRef idx="0">
+            <a:schemeClr val="accent1"/>
+          </a:fillRef>
+          <a:effectRef idx="1">
+            <a:schemeClr val="accent1"/>
+          </a:effectRef>
+          <a:fontRef idx="minor">
+            <a:schemeClr val="tx1"/>
+          </a:fontRef>
+        </p:style>
+      </p:cxnSp>
+      <p:graphicFrame>
+        <p:nvGraphicFramePr>
+          <p:cNvPr id="5" name="Table 4"/>
+          <p:cNvGraphicFramePr>
+            <a:graphicFrameLocks noGrp="1"/>
+          </p:cNvGraphicFramePr>
+          <p:nvPr/>
+        </p:nvGraphicFramePr>
+        <p:xfrm>
+          <a:off x="841248" y="1755648"/>
+          <a:ext cx="10509199" cy="3692144"/>
         </p:xfrm>
         <a:graphic>
           <a:graphicData uri="http://schemas.openxmlformats.org/drawingml/2006/table">
@@ -9159,7 +10124,7 @@
                   </a:tcPr>
                 </a:tc>
               </a:tr>
-              <a:tr h="653796">
+              <a:tr h="538480">
                 <a:tc>
                   <a:txBody>
                     <a:bodyPr wrap="square"/>
@@ -9211,7 +10176,7 @@
                           <a:ea typeface="Noto Sans JP"/>
                           <a:cs typeface="Noto Sans JP"/>
                         </a:rPr>
-                        <a:t>1 時間流し、1 台止めても受け続け、3 分以内に戻った</a:t>
+                        <a:t>1 台止めても受け続け、1 台ずつ入れ替えられた</a:t>
                       </a:r>
                     </a:p>
                   </a:txBody>
@@ -9277,7 +10242,7 @@
                           <a:ea typeface="Noto Sans JP"/>
                           <a:cs typeface="Noto Sans JP"/>
                         </a:rPr>
-                        <a:t>3.9.0 が green。1 台止めても yellow で検索できた</a:t>
+                        <a:t>1 台止めると yellow で検索でき、green に戻った</a:t>
                       </a:r>
                     </a:p>
                   </a:txBody>
@@ -9343,7 +10308,7 @@
                           <a:ea typeface="Noto Sans JP"/>
                           <a:cs typeface="Noto Sans JP"/>
                         </a:rPr>
-                        <a:t>396 系列が出た。vmstorage を 1 台止めても欠けない</a:t>
+                        <a:t>396 系列。vmstorage を 1 台止めても欠けない</a:t>
                       </a:r>
                     </a:p>
                   </a:txBody>
@@ -9409,7 +10374,7 @@
                           <a:ea typeface="Noto Sans JP"/>
                           <a:cs typeface="Noto Sans JP"/>
                         </a:rPr>
-                        <a:t>status と centrality が動き、sync-graph --oss で戻った</a:t>
+                        <a:t>Job が Neo4j に書き、止めても 2 段で戻った</a:t>
                       </a:r>
                     </a:p>
                   </a:txBody>
@@ -9475,7 +10440,7 @@
                           <a:ea typeface="Noto Sans JP"/>
                           <a:cs typeface="Noto Sans JP"/>
                         </a:rPr>
-                        <a:t>S3 Tables に 1 時間で 115,719 行。ほか 3 つにも入った</a:t>
+                        <a:t>S3 Tables に 59,991 行。Splunk ほかにも入った</a:t>
                       </a:r>
                     </a:p>
                   </a:txBody>

--- a/docs/architecture-oss.pptx
+++ b/docs/architecture-oss.pptx
@@ -776,12 +776,17 @@
           <a:lstStyle/>
           <a:p>
             <a:r>
-              <a:t>- 数は tf の resource ブロックの数（ルートの *.tf をつないで grep -c '^resource "'。シンボリックリンクの先も数える。2026-10-09、origin/main 9fb0616）。count・for_each で増える実数ではない。</a:t>
-            </a:r>
-          </a:p>
-          <a:p>
-            <a:r>
-              <a:t>- マネージド版の数は stream 57、graph 10、analytics 53、base/core 39。元のデッキの stream 46 は、013 で収集 4 種（gnmic・syslog-ng・GoFlow2）が入って 66 になった。</a:t>
+              <a:t>- 数は tf の resource ブロックの数（ルートの *.tf をつないで grep -c '^resource "'。シンボリックリンクの先も数える。2026-10-10、feat/035-s3-layout b39c543）。count・for_each で増える実数ではない。</a:t>
+            </a:r>
+          </a:p>
+          <a:p>
+            <a:r>
+              <a:t>- マネージド版の数は stream 57、graph 11、analytics 54、base/core 39。</a:t>
+            </a:r>
+          </a:p>
+          <a:p>
+            <a:r>
+              <a:t>- 2026-10-09 の数え（graph 23・analytics 79、マネージド版 10・53）から 1 つずつ増えた。元のデッキの stream 46 は、013 で収集 4 種（gnmic・syslog-ng・GoFlow2）が入って 66 になった。</a:t>
             </a:r>
           </a:p>
           <a:p>
@@ -791,7 +796,7 @@
           </a:p>
           <a:p>
             <a:r>
-              <a:t>- ほかの 6 つ（base/ecr・base/core・agent・workflow・pipeline/lab・pipeline/nautobot）は IaC/terraform/aws-managed/ の同じルートへのシンボリックリンクに oss.auto.tfvars を足しただけ。</a:t>
+              <a:t>- ほかの 7 つ（base/ecr・base/logs・base/core・agent・workflow・pipeline/lab・pipeline/nautobot）は IaC/terraform/aws-managed/ の同じルートへのシンボリックリンクに oss.auto.tfvars を足しただけ。</a:t>
             </a:r>
           </a:p>
           <a:p>
@@ -1066,7 +1071,12 @@
           <a:lstStyle/>
           <a:p>
             <a:r>
-              <a:t>- 作る順（ROOTS は ops/oss/up.sh:155）: base/ecr → base/core → agent → lab → stream → graph → nautobot → analytics → workflow。ops/oss/down.sh はこの逆。</a:t>
+              <a:t>- 作る順（ROOTS は ops/oss/up.sh:161）: base/ecr → base/logs → base/core → agent → lab → stream → graph → nautobot → analytics → workflow。</a:t>
+            </a:r>
+          </a:p>
+          <a:p>
+            <a:r>
+              <a:t>- ops/oss/down.sh はこの逆の順に 9 ルートを消し、base/logs（logs のバケット）は残す（ops/oss/down.sh:88-91）。</a:t>
             </a:r>
           </a:p>
           <a:p>
@@ -7634,7 +7644,7 @@
                 <a:ea typeface="Noto Sans JP"/>
                 <a:cs typeface="Noto Sans JP"/>
               </a:rPr>
-              <a:t>ルートはマネージド版と同じ 9 つで、自分のファイルを持つのは 3 つ</a:t>
+              <a:t>ルートはマネージド版と同じ 10 で、自分のファイルを持つのは 3 つ</a:t>
             </a:r>
           </a:p>
         </p:txBody>
@@ -7710,7 +7720,7 @@
                 <a:ea typeface="Noto Sans JP"/>
                 <a:cs typeface="Noto Sans JP"/>
               </a:rPr>
-              <a:t>置き場は IaC/terraform/oss/。ほかの 6 つは aws-managed/ へのリンクだけ。</a:t>
+              <a:t>置き場は IaC/terraform/oss/。ほかの 7 つは aws-managed/ へのリンクだけ。</a:t>
             </a:r>
           </a:p>
         </p:txBody>
@@ -8016,7 +8026,7 @@
                           <a:ea typeface="Noto Sans JP"/>
                           <a:cs typeface="Noto Sans JP"/>
                         </a:rPr>
-                        <a:t>23</a:t>
+                        <a:t>24</a:t>
                       </a:r>
                     </a:p>
                   </a:txBody>
@@ -8114,7 +8124,7 @@
                           <a:ea typeface="Noto Sans JP"/>
                           <a:cs typeface="Noto Sans JP"/>
                         </a:rPr>
-                        <a:t>79</a:t>
+                        <a:t>80</a:t>
                       </a:r>
                     </a:p>
                   </a:txBody>
@@ -9567,7 +9577,7 @@
                 <a:ea typeface="Noto Sans JP"/>
                 <a:cs typeface="Noto Sans JP"/>
               </a:rPr>
-              <a:t>ops/oss/up.sh は同じ 9 ルートを作り、down.sh が逆の順に消す</a:t>
+              <a:t>ops/oss/up.sh は同じ 10 ルートを作り、down.sh が base/logs を残して逆の順に消す</a:t>
             </a:r>
           </a:p>
         </p:txBody>

--- a/docs/architecture-oss.pptx
+++ b/docs/architecture-oss.pptx
@@ -776,12 +776,12 @@
           <a:lstStyle/>
           <a:p>
             <a:r>
-              <a:t>- 数は tf の resource ブロックの数（ルートの *.tf をつないで grep -c '^resource "'。シンボリックリンクの先も数える。2026-10-10、feat/035-s3-layout b39c543）。count・for_each で増える実数ではない。</a:t>
-            </a:r>
-          </a:p>
-          <a:p>
-            <a:r>
-              <a:t>- マネージド版の数は stream 57、graph 11、analytics 54、base/core 39。</a:t>
+              <a:t>- 数は tf の resource ブロックの数（ルートの *.tf をつないで grep -c '^resource "'。シンボリックリンクの先も数える。2026-10-12、docs/166-docs-sync bddbcb7）。count・for_each で増える実数ではない。</a:t>
+            </a:r>
+          </a:p>
+          <a:p>
+            <a:r>
+              <a:t>- マネージド版の数は stream 57、graph 11、analytics 54、base/core 41（base/core はマネージド版と同じファイル。2026-10-10 の数えの 39 から 2 つ増えた）。</a:t>
             </a:r>
           </a:p>
           <a:p>
@@ -1071,12 +1071,12 @@
           <a:lstStyle/>
           <a:p>
             <a:r>
-              <a:t>- 作る順（ROOTS は ops/oss/up.sh:161）: base/ecr → base/logs → base/core → agent → lab → stream → graph → nautobot → analytics → workflow。</a:t>
-            </a:r>
-          </a:p>
-          <a:p>
-            <a:r>
-              <a:t>- ops/oss/down.sh はこの逆の順に 9 ルートを消し、base/logs（logs のバケット）は残す（ops/oss/down.sh:88-91）。</a:t>
+              <a:t>- 作る順（ROOTS は ops/oss/up.sh の手順 0「道具と認証」の中で決める）: base/ecr → base/logs → base/core → agent → lab → stream → graph → nautobot → analytics → workflow。</a:t>
+            </a:r>
+          </a:p>
+          <a:p>
+            <a:r>
+              <a:t>- ops/oss/down.sh はこの逆の順に 9 ルートを消し、base/logs（logs のバケット）は残す（ops/oss/down.sh の頭のコメントと、終わりの「logs のバケット … は残す」の表示）。</a:t>
             </a:r>
           </a:p>
           <a:p>
@@ -4457,7 +4457,7 @@
                 <a:ea typeface="Menlo"/>
                 <a:cs typeface="Menlo"/>
               </a:rPr>
-              <a:t>2026-10-09  /  docs/oss-variant.md、docs/cycles/005-oss-on-ecs/design.md、IaC/terraform/oss/、IaC/terraform/aws-managed/base/core/oss.tf</a:t>
+              <a:t>2026-10-12  /  docs/oss-variant.md、docs/cycles/005-oss-on-ecs/design.md、IaC/terraform/oss/、IaC/terraform/aws-managed/base/core/oss.tf</a:t>
             </a:r>
           </a:p>
         </p:txBody>
@@ -8222,7 +8222,7 @@
                           <a:ea typeface="Noto Sans JP"/>
                           <a:cs typeface="Noto Sans JP"/>
                         </a:rPr>
-                        <a:t>39</a:t>
+                        <a:t>41</a:t>
                       </a:r>
                     </a:p>
                   </a:txBody>
